--- a/docs/presentation/daeng_kolloquium1_rama_stermcnik_vogelmann_birdreports.pptx
+++ b/docs/presentation/daeng_kolloquium1_rama_stermcnik_vogelmann_birdreports.pptx
@@ -21,6 +21,7 @@
     <p:sldId id="266" r:id="rId12"/>
     <p:sldId id="267" r:id="rId13"/>
     <p:sldId id="268" r:id="rId14"/>
+    <p:sldId id="269" r:id="rId20"/>
   </p:sldIdLst>
   <p:sldSz cx="12192000" cy="6858000"/>
   <p:notesSz cx="6858000" cy="12192000"/>
@@ -1478,7 +1479,9 @@
               <a:rPr lang="en-US" dirty="0"/>
               <a:t>SPRECHPUNKTE
 - Modell 3: je Quadrat eine Zeile pro Plattform (eBird, iNaturalist), Plattform wird mit allen Prädiktoren interagiert
-- Interaktionsterm Plattform × Siedlung = +0,235: iNaturalist hängt stärker am Siedlungsanteil als eBird, H3 gestützt
+- Primärer Test: Interaktionsterm +0,235, bei gleichem plattformeigenem Aufwand steigt die Abdeckung von iNaturalist mit dem Siedlungsanteil, die von eBird sinkt
+- Aber: Das hängt an der Spezifikation. Mit gemeinsamem Aufwandskoeffizienten −0,296, ohne Aufwand −0,714; rangbasiert eBird 0,36 und iNaturalist 0,33, also etwa gleich
+- Darum: H3 nur in der bedingten Form gestützt, die allgemeine Aussage tragen die Daten nicht
 - Bei gleichem Aufwand: iNaturalist +0,117, eBird −0,118, Observation.org −0,026 (kein Effekt)
 ABKÜRZUNGEN
 - Interaktionsterm = Differenz der Siedlungssteigung zwischen den Plattformen
@@ -1487,8 +1490,8 @@
 - Cluster = Standardfehler nach Quadrat gruppiert (jedes Quadrat kommt zweimal vor)
 - KI [0,151; 0,319], Holm-p = 7e-8
 WEITERES / MÖGLICHE RÜCKFRAGEN
-- Die Abbildung zeigt die unkontrollierten Klassenmittel der Siedlungsanteile
-- Warum alle Prädiktoren interagieren: Nur so darf auch der Aufwand je Plattform unterschiedlich wirken. Mit gemeinsamem Aufwandskoeffizienten kehrt sich das Vorzeichen um
+- Die Abbildung zeigt die unkontrollierten Klassenmittel: ohne Kontrolle steigt eBird absolut viel stärker, das ist Variante C
+- Warum alle Prädiktoren interagieren: Nur so darf auch der Aufwand je Plattform unterschiedlich wirken. Begründet, weil die Niveaus (37 % gegen 5 %) sehr verschieden sind; mit gemeinsamem Aufwandskoeffizienten kehrt sich das Vorzeichen um, darum zeigen wir beide
 - Lineares Modell ist eine Näherung (Anteile nahe 0), Hauptaussage tragen die Spearman-Tests</a:t>
             </a:r>
           </a:p>
@@ -1579,11 +1582,12 @@
               <a:t>SPRECHPUNKTE
 - FF1: Ja, über den Siedlungsanteil (H1), nicht über die unproduktive Fläche (H2)
 - Der Effekt läuft fast vollständig über den Aufwand: R² von 0,13 auf 0,86, Koeffizient Siedlung von +1,20 auf −0,06 (nicht mehr von null verschieden)
-- Mehr Siedlung, mehr Meldungen, mehr Abdeckung: Der Aufwand ist ein Mediator, das widerlegt H1 nicht
-- FF2: Ja, die Plattformen unterscheiden sich (H3, eBird 37 % gegen je rund 5 %)
+- Mehr Siedlung, mehr Meldungen, mehr Abdeckung: vereinbar mit einer Vermittlung über den Aufwand, aber mit Querschnittsdaten nicht von einer gemeinsamen Ursache (Erreichbarkeit) zu unterscheiden; das widerlegt H1 nicht
+- Der Zusammenhang Meldungen–Abdeckung ist teilweise mechanisch: mehr Meldungen erfassen zwangsläufig mehr Arten
+- FF2: im Niveau klar (eBird 37 % gegen je rund 5 %), im Muster nur bedingt: H3 hält nur mit plattformeigenem Aufwand als Kontrolle
 ABKÜRZUNGEN
 - R² = Bestimmtheitsmass, Anteil der erklärten Varianz
-- Mediator = Variable, über die ein Effekt läuft
+- Mediator = Variable, über die ein Effekt läuft (kausale Aussage, darum vorsichtig formuliert)
 - Modell 1 = nur Landnutzung, Modell 2 = Landnutzung plus Meldungen und Beobachter (logarithmiert)
 - n. s. = nicht signifikant
 WEITERES / MÖGLICHE RÜCKFRAGEN
@@ -1680,10 +1684,10 @@
               <a:t>SPRECHPUNKTE
 - Fazit in einem Satz: Plattformen bilden Brüter dort ab, wo viel gemeldet wird
 - Die Aussagen bleiben bei anderem Referenzalter und anderer Koordinatenschwelle gleich
-- Ausblick Teil 2: Option B, zwei Klassifikationsmodelle, danach Diskussion
+- Ausblick Teil 2: Option B, zwei Klassifikationsmodelle; Zielgrösse ist pro Art und Quadrat, ob die Art gemeldet wurde (ja/nein), darum Klassifikation; danach Diskussion
 ABKÜRZUNGEN
 - Moran's I = Mass für räumliche Autokorrelation (Residuen Modell 2: 0,113, p = 0,001)
-- Option B = Vergleich zweier Klassifikationsmodelle (z. B. logistische Regression und Random Forest), sagt die Abdeckung eines Quadrats voraus
+- Option B = Vergleich zweier Klassifikationsmodelle (z. B. logistische Regression und Random Forest), sagt pro Art/Quadrat-Paar voraus, ob die Art gemeldet wird
 - Option C (Alternative) = Assistent, der Fragen zu Verbreitung und Abdeckung beantwortet
 WEITERES / MÖGLICHE RÜCKFRAGEN
 - Grenzen: Referenz nicht unabhängig, Meldung ist kein Brutnachweis, Aufwand nur angenähert, Landnutzung zeitlich versetzt, Raster-Generalisierung auf 5 km
@@ -1778,7 +1782,7 @@
               <a:rPr lang="en-US" dirty="0"/>
               <a:t>SPRECHPUNKTE
 - Reservefolie für die Diskussion
-- Die Aussagen zu H1, H2 und H3 bleiben in allen drei Läufen gleich
+- Die Aussagen zu H1, H2 und H3 bleiben in allen drei Läufen gleich; H3 ist in allen Läufen nur mit plattformeigenem Aufwand positiv, ohne Aufwand überall negativ
 ABKÜRZUNGEN
 - n. s. = nicht signifikant
 - Sensitivität = Wiederholung der Analyse mit veränderter Setzung
@@ -1820,6 +1824,63 @@
         <p14:creationId xmlns:p14="http://schemas.microsoft.com/office/powerpoint/2010/main" val="1024086991"/>
       </p:ext>
     </p:extLst>
+  </p:cSld>
+  <p:clrMapOvr>
+    <a:masterClrMapping/>
+  </p:clrMapOvr>
+</p:notes>
+</file>
+
+<file path=ppt/notesSlides/notesSlide14.xml><?xml version="1.0" encoding="utf-8"?>
+<p:notes xmlns:a="http://schemas.openxmlformats.org/drawingml/2006/main" xmlns:p="http://schemas.openxmlformats.org/presentationml/2006/main" xmlns:r="http://schemas.openxmlformats.org/officeDocument/2006/relationships">
+  <p:cSld>
+    <p:spTree>
+      <p:nvGrpSpPr>
+        <p:cNvPr id="1" name=""/>
+        <p:cNvGrpSpPr/>
+        <p:nvPr/>
+      </p:nvGrpSpPr>
+      <p:grpSpPr>
+        <a:xfrm>
+          <a:off x="0" y="0"/>
+          <a:ext cx="0" cy="0"/>
+          <a:chOff x="0" y="0"/>
+          <a:chExt cx="0" cy="0"/>
+        </a:xfrm>
+      </p:grpSpPr>
+      <p:sp>
+        <p:nvSpPr>
+          <p:cNvPr id="3" name="Notes Placeholder 2"/>
+          <p:cNvSpPr>
+            <a:spLocks noGrp="1"/>
+          </p:cNvSpPr>
+          <p:nvPr>
+            <p:ph type="body" idx="1"/>
+          </p:nvPr>
+        </p:nvSpPr>
+        <p:spPr/>
+        <p:txBody>
+          <a:bodyPr/>
+          <a:lstStyle/>
+          <a:p>
+            <a:r>
+              <a:rPr lang="en-US" dirty="0"/>
+              <a:t>SPRECHPUNKTE
+- Reservefolie für die Diskussion zur Skalierbarkeit
+- Heute: rund 600'000 bereinigte Meldungen, 1'839 Quadrate, wenige Minuten auf einem Laptop
+- Szenarien: 10-mal mehr Daten (weitere Jahre, Nachbarländer; eBird Schweiz wuchs von 49'000 auf 401'000 Meldungen pro Jahr) oder ein 1-km-Raster
+- Erste Grenze ist die Transformation in pandas, nicht der Speicher
+ABKÜRZUNGEN
+- RAM = Arbeitsspeicher
+- Partitionierung = Aufteilung der Parquet-Dateien nach einem Schlüssel, z. B. Jahr
+WEITERES / MÖGLICHE RÜCKFRAGEN
+- Verteilt (Spark) wäre erst bei einem Vielfachen sinnvoll; DuckDB verarbeitet Daten grösser als der Arbeitsspeicher auf einem Rechner
+- Der GBIF-Download wird asynchron erzeugt und ist für grosse Abfragen gedacht</a:t>
+            </a:r>
+          </a:p>
+        </p:txBody>
+      </p:sp>
+    </p:spTree>
   </p:cSld>
   <p:clrMapOvr>
     <a:masterClrMapping/>
@@ -2076,19 +2137,21 @@
               <a:t>SPRECHPUNKTE
 - Lebenszyklus nach Reis &amp; Housley (2022): Generierung, Ingestion, Storage, Transformation, Serving
 - Daten sind begrenzt und kommen per Pull im Batch; Streaming oder Lambda wären nicht begründbar
-- ELT: zuerst laden, dann transformieren, damit die Rohdaten für die Prüfung unverändert bleiben
+- ETL, nicht ELT: DuckDB filtert beim Lesen der Roh-CSV, Raster, Artabgleich und Hashing laufen in Python (pandas, pyproj), erst danach wird in Parquet und DuckDB geladen. Die Rohdaten bleiben trotzdem unverändert
 - Schwerpunkt der Arbeit ist die Transformation (gelb)
 - Entscheid: priorisieren Reproduzierbarkeit, akzeptieren veraltete Daten, begrenzen das Risiko durch versionierte Rohdaten
 ABKÜRZUNGEN
-- ELT = Extract, Load, Transform (ETL: Transformation vor dem Laden)
+- ETL = Extract, Transform, Load (ELT: Transformation erst im Zielsystem)
 - Bounded = begrenzter Datensatz, im Gegensatz zu unbegrenzten Datenströmen
 - Pull = wir holen die Daten ab, die Quelle liefert nicht von sich aus
 - DataOps = Automatisierung und Reproduzierbarkeit der Pipeline
 - DOI = Digital Object Identifier
 WEITERES / MÖGLICHE RÜCKFRAGEN
 - Die sechs Unterströmungen (Security, Data Management, DataOps, Data Architecture, Orchestration, Software Engineering) gelten für alle Phasen
-- Orchestration: feste Skriptreihenfolge genügt, ein Orchestrator wie Airflow wäre bei diesem Volumen nicht begründbar
-- Der Entscheid ist umkehrbar, jede Schicht lässt sich aus der vorherigen neu berechnen</a:t>
+- Orchestration: run_all.sh führt alle Schritte in fester Reihenfolge aus und bricht ab, wenn eine Datenprüfung fehlschlägt; ein Orchestrator wie Airflow wäre bei diesem Volumen nicht begründbar
+- Der Entscheid ist umkehrbar, jede Schicht lässt sich aus der vorherigen neu berechnen
+- Skalierbarkeit (Reservefolie 14): Grenze ist der Arbeitsspeicher in der Transformation (pandas); nächster Schritt wäre Raster und Aggregation in DuckDB-SQL und Parquet nach Jahr partitioniert
+- Hypothesentests gehören nach der Aufgabenstellung zur Transformation Teil 1, Serving im engeren Sinn folgt in Teil 2</a:t>
             </a:r>
           </a:p>
         </p:txBody>
@@ -2282,8 +2345,8 @@
               <a:t>SPRECHPUNKTE
 - Einordnung nach Vorlesung: dateibasierte Speicherung (File Storage) mit relationalem Datenmodell
 - Messung: Aggregation auf 5-km-Quadrate 0,01 s gegen 1,13 s, Datenbank 47 MB gegen 273 MB; Einzelmessung auf den Projektdaten
-- SQLite-Datei läge über dem GitHub-Limit von 100 MB pro Datei
-- Entscheid: priorisieren Einfachheit und Reproduzierbarkeit, akzeptieren einen Schreiber, begrenzen das Risiko durch unveränderte Rohdaten in Parquet
+- Rollen: Parquet ist die Ablage (Notebook, Prüfungen und Tests lesen dort), DuckDB die Abfrage-Engine (liest die Roh-CSV, birdreports.duckdb bündelt alle Tabellen für SQL; das Notebook fragt damit ab, welche Arten am häufigsten fehlen)
+- Messung ehrlich lesen: Einzelmessung, DuckDB lädt mit eigenem Leser, SQLite über pandas, darum Ladezeiten nur bedingt vergleichbar; der Faktor 100 bei Aggregationen ist der erwartete Unterschied spalten- gegen zeilenorientiert
 ABKÜRZUNGEN
 - DuckDB = spaltenbasierte (columnar) analytische Datenbank, läuft im Prozess, ohne Server (OLAP)
 - SQLite = zeilenbasierte eingebettete Datenbank, für transaktionale Last (OLTP)
@@ -2396,7 +2459,8 @@
 - Der Unterschied zwischen 2'500 m und 5'000 m Schwelle ist klein, 5'000 m läuft als Sensitivität
 - 16 Artnamen umbenannt, Ficedula parva hat keine Plattformmeldung im Zeitraum
 - Rohdaten bleiben unverändert, alle Ergebnisse landen in eigenen Ausgabeordnern
-- 45 der 1'614 Quadrate haben weniger als 5 Referenzarten, die Quote ist dort sehr grob</a:t>
+- 45 der 1'614 Quadrate haben weniger als 5 Referenzarten, die Quote ist dort sehr grob
+- Datenprüfungen (src/check_outputs.py): u. a. Art/Quadrat-Paare eindeutig, Brutmonate und Ungenauigkeit im erlaubten Bereich, Anteile summieren sich auf 1, Abdeckung zwischen 0 und 1, keine Klarnamen, Treffer aus den bereinigten Tabellen nachgezählt</a:t>
             </a:r>
           </a:p>
         </p:txBody>
@@ -2488,7 +2552,7 @@
 - Hohe Abdeckung im Mittelland, wo viele Menschen wohnen, niedrige in Alpen und Jura (viel unproduktive Fläche)
 - Mittlere Abdeckung: eBird 37,2 %, iNaturalist 5,2 %, Observation.org 5,5 %
 ABKÜRZUNGEN
-- Abdeckung = Anteil der Referenzpaare (Art/Quadrat) mit Plattformmeldung
+- Abdeckungsquote = Anteil der Arten mit Brutnachweis eines Quadrats, die gemeldet wurden; die Werte sind Mittel über die Quadrate (Anteil über alle Paare: eBird rund 34 %)
 - Koordinaten in LV95 (km), Farbe = Anteil von 0 bis 1 (Farbskala viridis)
 - Siedlungsanteil und Anteil unproduktiv = Anteil der Hektarpunkte der Arealstatistik im Quadrat
 WEITERES / MÖGLICHE RÜCKFRAGEN
@@ -2586,7 +2650,7 @@
 - Auffällig: Die Zahl der Meldungen im Quadrat hängt fast perfekt mit der Abdeckung zusammen (rho 0,93)
 ABKÜRZUNGEN
 - rho = Spearman-Rangkorrelationskoeffizient (−1 bis +1)
-- KI = Konfidenzintervall, Standardfehler nach Bonett &amp; Wright (2000)
+- KI = Konfidenzintervall über die Fisher-z-Transformation, Varianz (1 + rho²/2)/(n − 3) nach Bonett &amp; Wright (2000)
 - p (Holm) = p-Wert nach Holm-Korrektur über die drei Haupttests
 - Hexbin = Streudiagramm mit Wabenzellen, Farbe zeigt die Dichte (log)
 WEITERES / MÖGLICHE RÜCKFRAGEN
@@ -3594,7 +3658,7 @@
                   <a:schemeClr val="bg1"/>
                 </a:solidFill>
               </a:rPr>
-              <a:t>H3: iNaturalist hängt stärker an der Siedlung</a:t>
+              <a:t>H3: nur unter Aufwandskontrolle gestützt</a:t>
             </a:r>
             <a:endParaRPr lang="en-US" sz="3000" dirty="0"/>
           </a:p>
@@ -3716,7 +3780,7 @@
                           <a:ea typeface="Arial" pitchFamily="34" charset="-122"/>
                           <a:cs typeface="Arial" pitchFamily="34" charset="-120"/>
                         </a:rPr>
-                        <a:t>Siedlungsanteil</a:t>
+                        <a:t>Interaktion iNaturalist × Siedlung</a:t>
                       </a:r>
                       <a:endParaRPr lang="en-US" sz="1400" dirty="0">
                         <a:latin typeface="Arial" charset="0"/>
@@ -3784,7 +3848,7 @@
                           <a:ea typeface="Arial" pitchFamily="34" charset="-122"/>
                           <a:cs typeface="Arial" pitchFamily="34" charset="-120"/>
                         </a:rPr>
-                        <a:t>Wirkung</a:t>
+                        <a:t>Wert [95 %-KI]</a:t>
                       </a:r>
                       <a:endParaRPr lang="en-US" sz="1400" dirty="0">
                         <a:latin typeface="Arial" charset="0"/>
@@ -3859,7 +3923,7 @@
                           <a:ea typeface="Arial" pitchFamily="34" charset="-122"/>
                           <a:cs typeface="Arial" pitchFamily="34" charset="-120"/>
                         </a:rPr>
-                        <a:t>Interaktion Plattform × Siedlung</a:t>
+                        <a:t>mit plattformeigenem Aufwand (primärer Test)</a:t>
                       </a:r>
                       <a:endParaRPr lang="en-US" sz="1500" dirty="0">
                         <a:latin typeface="Arial" charset="0"/>
@@ -3996,7 +4060,7 @@
                           <a:ea typeface="Arial" pitchFamily="34" charset="-122"/>
                           <a:cs typeface="Arial" pitchFamily="34" charset="-120"/>
                         </a:rPr>
-                        <a:t>Steigung bei gleichem Aufwand</a:t>
+                        <a:t>Robustheit</a:t>
                       </a:r>
                       <a:endParaRPr lang="en-US" sz="1500" dirty="0">
                         <a:latin typeface="Arial" charset="0"/>
@@ -4128,7 +4192,7 @@
                           <a:ea typeface="Arial" pitchFamily="34" charset="-122"/>
                           <a:cs typeface="Arial" pitchFamily="34" charset="-120"/>
                         </a:rPr>
-                        <a:t>iNaturalist</a:t>
+                        <a:t>Aufwand mit gemeinsamem Koeffizienten</a:t>
                       </a:r>
                       <a:endParaRPr lang="en-US" sz="1500" dirty="0">
                         <a:latin typeface="Arial" charset="0"/>
@@ -4193,7 +4257,7 @@
                           <a:ea typeface="Arial" pitchFamily="34" charset="-122"/>
                           <a:cs typeface="Arial" pitchFamily="34" charset="-120"/>
                         </a:rPr>
-                        <a:t>+0,117</a:t>
+                        <a:t>−0,296 [−0,376; −0,215]</a:t>
                       </a:r>
                       <a:endParaRPr lang="en-US" sz="1500" dirty="0">
                         <a:latin typeface="Arial" charset="0"/>
@@ -4265,7 +4329,7 @@
                           <a:ea typeface="Arial" pitchFamily="34" charset="-122"/>
                           <a:cs typeface="Arial" pitchFamily="34" charset="-120"/>
                         </a:rPr>
-                        <a:t>Observation.org</a:t>
+                        <a:t>ohne Kontrolle des Aufwands</a:t>
                       </a:r>
                       <a:endParaRPr lang="en-US" sz="1500" dirty="0">
                         <a:latin typeface="Arial" charset="0"/>
@@ -4330,7 +4394,7 @@
                           <a:ea typeface="Arial" pitchFamily="34" charset="-122"/>
                           <a:cs typeface="Arial" pitchFamily="34" charset="-120"/>
                         </a:rPr>
-                        <a:t>−0,026 (kein Effekt)</a:t>
+                        <a:t>−0,714 [−0,871; −0,557]</a:t>
                       </a:r>
                       <a:endParaRPr lang="en-US" sz="1500" dirty="0">
                         <a:latin typeface="Arial" charset="0"/>
@@ -4402,7 +4466,7 @@
                           <a:ea typeface="Arial" pitchFamily="34" charset="-122"/>
                           <a:cs typeface="Arial" pitchFamily="34" charset="-120"/>
                         </a:rPr>
-                        <a:t>eBird</a:t>
+                        <a:t>Spearman eBird / iNaturalist (ohne Kontrolle)</a:t>
                       </a:r>
                       <a:endParaRPr lang="en-US" sz="1500" dirty="0">
                         <a:latin typeface="Arial" charset="0"/>
@@ -4467,7 +4531,7 @@
                           <a:ea typeface="Arial" pitchFamily="34" charset="-122"/>
                           <a:cs typeface="Arial" pitchFamily="34" charset="-120"/>
                         </a:rPr>
-                        <a:t>−0,118</a:t>
+                        <a:t>0,36 / 0,33</a:t>
                       </a:r>
                       <a:endParaRPr lang="en-US" sz="1500" dirty="0">
                         <a:latin typeface="Arial" charset="0"/>
@@ -4555,7 +4619,7 @@
                   <a:schemeClr val="accent4"/>
                 </a:solidFill>
               </a:rPr>
-              <a:t>Die Abbildung zeigt die unkontrollierten Klassenmittel des Siedlungsanteils.</a:t>
+              <a:t>Die Abbildung zeigt die unkontrollierten Klassenmittel: Ohne Kontrolle steigt eBird stärker an als iNaturalist.</a:t>
             </a:r>
             <a:endParaRPr lang="en-US" sz="1200" dirty="0"/>
           </a:p>
@@ -4665,7 +4729,7 @@
                   <a:schemeClr val="bg1"/>
                 </a:solidFill>
               </a:rPr>
-              <a:t>Siedlung wirkt über den Aufwand</a:t>
+              <a:t>Der Aufwand erklärt fast alles</a:t>
             </a:r>
             <a:endParaRPr lang="en-US" sz="3000" dirty="0"/>
           </a:p>
@@ -4769,7 +4833,7 @@
                   <a:schemeClr val="accent1"/>
                 </a:solidFill>
               </a:rPr>
-              <a:t>FF1 Landnutzung: ja, über die Siedlung</a:t>
+              <a:t>FF1 Landnutzung: ja, aber über den Aufwand</a:t>
             </a:r>
             <a:endParaRPr lang="en-US" sz="1800" dirty="0"/>
           </a:p>
@@ -4783,7 +4847,7 @@
                   <a:schemeClr val="tx1"/>
                 </a:solidFill>
               </a:rPr>
-              <a:t>Mehr Siedlung, mehr Abdeckung (H1). Unproduktive Fläche zeigt keinen Zusammenhang (H2). Der Effekt läuft fast vollständig über den Beobachtungsaufwand.</a:t>
+              <a:t>Mehr Siedlung, mehr Abdeckung (H1). Unproduktive Fläche zeigt keinen Zusammenhang (H2). Mit Kontrolle des Aufwands verschwindet der Siedlungseffekt.</a:t>
             </a:r>
             <a:endParaRPr lang="en-US" sz="1800" dirty="0"/>
           </a:p>
@@ -4811,7 +4875,7 @@
                   <a:schemeClr val="accent1"/>
                 </a:solidFill>
               </a:rPr>
-              <a:t>FF2 Plattformen: ja, sie unterscheiden sich</a:t>
+              <a:t>FF2 Plattformen: im Niveau ja, im Muster bedingt</a:t>
             </a:r>
             <a:endParaRPr lang="en-US" sz="1800" dirty="0"/>
           </a:p>
@@ -4825,7 +4889,7 @@
                   <a:schemeClr val="tx1"/>
                 </a:solidFill>
               </a:rPr>
-              <a:t>iNaturalist hängt stärker an der Siedlung als eBird (H3). eBird deckt 37 % der Referenzpaare ab, iNaturalist und Observation.org je rund 5 %.</a:t>
+              <a:t>eBird erreicht im Mittel 37 % pro Quadrat, iNaturalist und Observation.org je rund 5 %. H3 hält nur mit plattformeigenem Aufwand als Kontrolle.</a:t>
             </a:r>
             <a:endParaRPr lang="en-US" sz="1800" dirty="0"/>
           </a:p>
@@ -5493,7 +5557,7 @@
         <p:spPr>
           <a:xfrm>
             <a:off x="6766560" y="3566160"/>
-            <a:ext cx="4873752" cy="1645920"/>
+            <a:ext cx="4873752" cy="2103120"/>
           </a:xfrm>
           <a:prstGeom prst="rect">
             <a:avLst/>
@@ -5525,7 +5589,7 @@
         <p:spPr>
           <a:xfrm>
             <a:off x="6995160" y="3749040"/>
-            <a:ext cx="4416552" cy="1280160"/>
+            <a:ext cx="4416552" cy="1737360"/>
           </a:xfrm>
           <a:prstGeom prst="rect">
             <a:avLst/>
@@ -5546,7 +5610,7 @@
                   <a:schemeClr val="tx1"/>
                 </a:solidFill>
               </a:rPr>
-              <a:t>Wo mehr Menschen wohnen, wird mehr gemeldet, und mehr Meldungen decken mehr Arten ab. Das widerlegt H1 nicht, der Aufwand ist ein Mediator.</a:t>
+              <a:t>Wo mehr Menschen wohnen, wird mehr gemeldet, und mehr Meldungen decken mehr Arten ab. Ob der Aufwand vermittelt oder eine gemeinsame Ursache wie die Erreichbarkeit wirkt, trennen Querschnittsdaten nicht.</a:t>
             </a:r>
             <a:endParaRPr lang="en-US" sz="1600" dirty="0"/>
           </a:p>
@@ -5788,7 +5852,7 @@
                   <a:schemeClr val="tx1"/>
                 </a:solidFill>
               </a:rPr>
-              <a:t>Plattformen bilden Brüter dort ab, wo viel gemeldet wird. Die Landnutzung erklärt vor allem, wo gemeldet wird. Die Ergebnisse bleiben bei anderem Referenzalter und anderer Koordinatenschwelle gleich.</a:t>
+              <a:t>Plattformen bilden Brüter dort ab, wo viel gemeldet wird; die Landnutzung erklärt vor allem, wo gemeldet wird. H3 hält nur bedingt. Robust gegenüber Referenzalter und Koordinatenschwelle.</a:t>
             </a:r>
             <a:endParaRPr lang="en-US" sz="1700" dirty="0"/>
           </a:p>
@@ -5884,7 +5948,7 @@
                   <a:schemeClr val="tx1"/>
                 </a:solidFill>
               </a:rPr>
-              <a:t>Referenz nicht unabhängig. Meldung ist kein Brutnachweis. Aufwand nur angenähert. Benachbarte Quadrate sind ähnlich (Moran's I 0,11). Lineares Modell für Anteile nahe 0, Spearman trägt die Aussage.</a:t>
+              <a:t>Referenz nicht unabhängig. Meldung ist kein Brutnachweis. Aufwand nur angenähert. Benachbarte Quadrate sind ähnlich (Moran's I 0,11). H3 hängt an der Modellwahl.</a:t>
             </a:r>
             <a:endParaRPr lang="en-US" sz="1700" dirty="0"/>
           </a:p>
@@ -5980,7 +6044,7 @@
                   <a:schemeClr val="tx1"/>
                 </a:solidFill>
               </a:rPr>
-              <a:t>Zwei Klassifikationsmodelle (Option B) sagen die Abdeckung eines Quadrats voraus. Für die Quote wäre ein binomiales Modell passender.</a:t>
+              <a:t>Option B: zwei Klassifikationsmodelle auf Art/Quadrat-Paaren (gemeldet ja/nein), z. B. logistische Regression und Random Forest. Für die Quote eines Quadrats wäre ein binomiales Modell passender.</a:t>
             </a:r>
             <a:endParaRPr lang="en-US" sz="1700" dirty="0"/>
           </a:p>
@@ -6148,7 +6212,2637 @@
         </p:nvGraphicFramePr>
         <p:xfrm>
           <a:off x="548640" y="1600200"/>
-          <a:ext cx="11091672" cy="4242816"/>
+          <a:ext cx="11091672" cy="4279392"/>
+        </p:xfrm>
+        <a:graphic>
+          <a:graphicData uri="http://schemas.openxmlformats.org/drawingml/2006/table">
+            <a:tbl>
+              <a:tblPr/>
+              <a:tblGrid>
+                <a:gridCol w="2926080">
+                  <a:extLst>
+                    <a:ext uri="{9D8B030D-6E8A-4147-A177-3AD203B41FA5}">
+                      <a16:colId xmlns:a16="http://schemas.microsoft.com/office/drawing/2014/main" val="20000"/>
+                    </a:ext>
+                  </a:extLst>
+                </a:gridCol>
+                <a:gridCol w="2926080">
+                  <a:extLst>
+                    <a:ext uri="{9D8B030D-6E8A-4147-A177-3AD203B41FA5}">
+                      <a16:colId xmlns:a16="http://schemas.microsoft.com/office/drawing/2014/main" val="20001"/>
+                    </a:ext>
+                  </a:extLst>
+                </a:gridCol>
+                <a:gridCol w="2377440">
+                  <a:extLst>
+                    <a:ext uri="{9D8B030D-6E8A-4147-A177-3AD203B41FA5}">
+                      <a16:colId xmlns:a16="http://schemas.microsoft.com/office/drawing/2014/main" val="20002"/>
+                    </a:ext>
+                  </a:extLst>
+                </a:gridCol>
+                <a:gridCol w="2862072">
+                  <a:extLst>
+                    <a:ext uri="{9D8B030D-6E8A-4147-A177-3AD203B41FA5}">
+                      <a16:colId xmlns:a16="http://schemas.microsoft.com/office/drawing/2014/main" val="20003"/>
+                    </a:ext>
+                  </a:extLst>
+                </a:gridCol>
+              </a:tblGrid>
+              <a:tr h="475488">
+                <a:tc>
+                  <a:txBody>
+                    <a:bodyPr/>
+                    <a:lstStyle/>
+                    <a:p>
+                      <a:pPr marL="0" indent="0">
+                        <a:buNone/>
+                      </a:pPr>
+                      <a:endParaRPr lang="en-US" sz="1400" dirty="0">
+                        <a:latin typeface="Arial" charset="0"/>
+                        <a:ea typeface="Arial" charset="0"/>
+                        <a:cs typeface="Arial" charset="0"/>
+                      </a:endParaRPr>
+                    </a:p>
+                  </a:txBody>
+                  <a:tcPr marT="54864" marB="54864" anchor="ctr">
+                    <a:lnL w="9525" cap="flat" cmpd="sng" algn="ctr">
+                      <a:solidFill>
+                        <a:srgbClr val="BFC5CC"/>
+                      </a:solidFill>
+                      <a:prstDash val="solid"/>
+                      <a:round/>
+                      <a:headEnd type="none" w="med" len="med"/>
+                      <a:tailEnd type="none" w="med" len="med"/>
+                    </a:lnL>
+                    <a:lnR w="9525" cap="flat" cmpd="sng" algn="ctr">
+                      <a:solidFill>
+                        <a:srgbClr val="BFC5CC"/>
+                      </a:solidFill>
+                      <a:prstDash val="solid"/>
+                      <a:round/>
+                      <a:headEnd type="none" w="med" len="med"/>
+                      <a:tailEnd type="none" w="med" len="med"/>
+                    </a:lnR>
+                    <a:lnT w="9525" cap="flat" cmpd="sng" algn="ctr">
+                      <a:solidFill>
+                        <a:srgbClr val="BFC5CC"/>
+                      </a:solidFill>
+                      <a:prstDash val="solid"/>
+                      <a:round/>
+                      <a:headEnd type="none" w="med" len="med"/>
+                      <a:tailEnd type="none" w="med" len="med"/>
+                    </a:lnT>
+                    <a:lnB w="9525" cap="flat" cmpd="sng" algn="ctr">
+                      <a:solidFill>
+                        <a:srgbClr val="BFC5CC"/>
+                      </a:solidFill>
+                      <a:prstDash val="solid"/>
+                      <a:round/>
+                      <a:headEnd type="none" w="med" len="med"/>
+                      <a:tailEnd type="none" w="med" len="med"/>
+                    </a:lnB>
+                    <a:solidFill>
+                      <a:schemeClr val="tx2"/>
+                    </a:solidFill>
+                  </a:tcPr>
+                </a:tc>
+                <a:tc>
+                  <a:txBody>
+                    <a:bodyPr/>
+                    <a:lstStyle/>
+                    <a:p>
+                      <a:pPr marL="0" indent="0">
+                        <a:buNone/>
+                      </a:pPr>
+                      <a:r>
+                        <a:rPr lang="en-US" sz="1400" b="1" dirty="0">
+                          <a:solidFill>
+                            <a:schemeClr val="bg1"/>
+                          </a:solidFill>
+                          <a:latin typeface="Arial" pitchFamily="34" charset="0"/>
+                          <a:ea typeface="Arial" pitchFamily="34" charset="-122"/>
+                          <a:cs typeface="Arial" pitchFamily="34" charset="-120"/>
+                        </a:rPr>
+                        <a:t>Hauptanalyse (ab 2020, 2'500 m)</a:t>
+                      </a:r>
+                      <a:endParaRPr lang="en-US" sz="1400" dirty="0">
+                        <a:latin typeface="Arial" charset="0"/>
+                        <a:ea typeface="Arial" charset="0"/>
+                        <a:cs typeface="Arial" charset="0"/>
+                      </a:endParaRPr>
+                    </a:p>
+                  </a:txBody>
+                  <a:tcPr marT="54864" marB="54864" anchor="ctr">
+                    <a:lnL w="9525" cap="flat" cmpd="sng" algn="ctr">
+                      <a:solidFill>
+                        <a:srgbClr val="BFC5CC"/>
+                      </a:solidFill>
+                      <a:prstDash val="solid"/>
+                      <a:round/>
+                      <a:headEnd type="none" w="med" len="med"/>
+                      <a:tailEnd type="none" w="med" len="med"/>
+                    </a:lnL>
+                    <a:lnR w="9525" cap="flat" cmpd="sng" algn="ctr">
+                      <a:solidFill>
+                        <a:srgbClr val="BFC5CC"/>
+                      </a:solidFill>
+                      <a:prstDash val="solid"/>
+                      <a:round/>
+                      <a:headEnd type="none" w="med" len="med"/>
+                      <a:tailEnd type="none" w="med" len="med"/>
+                    </a:lnR>
+                    <a:lnT w="9525" cap="flat" cmpd="sng" algn="ctr">
+                      <a:solidFill>
+                        <a:srgbClr val="BFC5CC"/>
+                      </a:solidFill>
+                      <a:prstDash val="solid"/>
+                      <a:round/>
+                      <a:headEnd type="none" w="med" len="med"/>
+                      <a:tailEnd type="none" w="med" len="med"/>
+                    </a:lnT>
+                    <a:lnB w="9525" cap="flat" cmpd="sng" algn="ctr">
+                      <a:solidFill>
+                        <a:srgbClr val="BFC5CC"/>
+                      </a:solidFill>
+                      <a:prstDash val="solid"/>
+                      <a:round/>
+                      <a:headEnd type="none" w="med" len="med"/>
+                      <a:tailEnd type="none" w="med" len="med"/>
+                    </a:lnB>
+                    <a:solidFill>
+                      <a:schemeClr val="tx2"/>
+                    </a:solidFill>
+                  </a:tcPr>
+                </a:tc>
+                <a:tc>
+                  <a:txBody>
+                    <a:bodyPr/>
+                    <a:lstStyle/>
+                    <a:p>
+                      <a:pPr marL="0" indent="0">
+                        <a:buNone/>
+                      </a:pPr>
+                      <a:r>
+                        <a:rPr lang="en-US" sz="1400" b="1" dirty="0">
+                          <a:solidFill>
+                            <a:schemeClr val="bg1"/>
+                          </a:solidFill>
+                          <a:latin typeface="Arial" pitchFamily="34" charset="0"/>
+                          <a:ea typeface="Arial" pitchFamily="34" charset="-122"/>
+                          <a:cs typeface="Arial" pitchFamily="34" charset="-120"/>
+                        </a:rPr>
+                        <a:t>alle Nachweise</a:t>
+                      </a:r>
+                      <a:endParaRPr lang="en-US" sz="1400" dirty="0">
+                        <a:latin typeface="Arial" charset="0"/>
+                        <a:ea typeface="Arial" charset="0"/>
+                        <a:cs typeface="Arial" charset="0"/>
+                      </a:endParaRPr>
+                    </a:p>
+                  </a:txBody>
+                  <a:tcPr marT="54864" marB="54864" anchor="ctr">
+                    <a:lnL w="9525" cap="flat" cmpd="sng" algn="ctr">
+                      <a:solidFill>
+                        <a:srgbClr val="BFC5CC"/>
+                      </a:solidFill>
+                      <a:prstDash val="solid"/>
+                      <a:round/>
+                      <a:headEnd type="none" w="med" len="med"/>
+                      <a:tailEnd type="none" w="med" len="med"/>
+                    </a:lnL>
+                    <a:lnR w="9525" cap="flat" cmpd="sng" algn="ctr">
+                      <a:solidFill>
+                        <a:srgbClr val="BFC5CC"/>
+                      </a:solidFill>
+                      <a:prstDash val="solid"/>
+                      <a:round/>
+                      <a:headEnd type="none" w="med" len="med"/>
+                      <a:tailEnd type="none" w="med" len="med"/>
+                    </a:lnR>
+                    <a:lnT w="9525" cap="flat" cmpd="sng" algn="ctr">
+                      <a:solidFill>
+                        <a:srgbClr val="BFC5CC"/>
+                      </a:solidFill>
+                      <a:prstDash val="solid"/>
+                      <a:round/>
+                      <a:headEnd type="none" w="med" len="med"/>
+                      <a:tailEnd type="none" w="med" len="med"/>
+                    </a:lnT>
+                    <a:lnB w="9525" cap="flat" cmpd="sng" algn="ctr">
+                      <a:solidFill>
+                        <a:srgbClr val="BFC5CC"/>
+                      </a:solidFill>
+                      <a:prstDash val="solid"/>
+                      <a:round/>
+                      <a:headEnd type="none" w="med" len="med"/>
+                      <a:tailEnd type="none" w="med" len="med"/>
+                    </a:lnB>
+                    <a:solidFill>
+                      <a:schemeClr val="tx2"/>
+                    </a:solidFill>
+                  </a:tcPr>
+                </a:tc>
+                <a:tc>
+                  <a:txBody>
+                    <a:bodyPr/>
+                    <a:lstStyle/>
+                    <a:p>
+                      <a:pPr marL="0" indent="0">
+                        <a:buNone/>
+                      </a:pPr>
+                      <a:r>
+                        <a:rPr lang="en-US" sz="1400" b="1" dirty="0">
+                          <a:solidFill>
+                            <a:schemeClr val="bg1"/>
+                          </a:solidFill>
+                          <a:latin typeface="Arial" pitchFamily="34" charset="0"/>
+                          <a:ea typeface="Arial" pitchFamily="34" charset="-122"/>
+                          <a:cs typeface="Arial" pitchFamily="34" charset="-120"/>
+                        </a:rPr>
+                        <a:t>iNaturalist bis 5'000 m</a:t>
+                      </a:r>
+                      <a:endParaRPr lang="en-US" sz="1400" dirty="0">
+                        <a:latin typeface="Arial" charset="0"/>
+                        <a:ea typeface="Arial" charset="0"/>
+                        <a:cs typeface="Arial" charset="0"/>
+                      </a:endParaRPr>
+                    </a:p>
+                  </a:txBody>
+                  <a:tcPr marT="54864" marB="54864" anchor="ctr">
+                    <a:lnL w="9525" cap="flat" cmpd="sng" algn="ctr">
+                      <a:solidFill>
+                        <a:srgbClr val="BFC5CC"/>
+                      </a:solidFill>
+                      <a:prstDash val="solid"/>
+                      <a:round/>
+                      <a:headEnd type="none" w="med" len="med"/>
+                      <a:tailEnd type="none" w="med" len="med"/>
+                    </a:lnL>
+                    <a:lnR w="9525" cap="flat" cmpd="sng" algn="ctr">
+                      <a:solidFill>
+                        <a:srgbClr val="BFC5CC"/>
+                      </a:solidFill>
+                      <a:prstDash val="solid"/>
+                      <a:round/>
+                      <a:headEnd type="none" w="med" len="med"/>
+                      <a:tailEnd type="none" w="med" len="med"/>
+                    </a:lnR>
+                    <a:lnT w="9525" cap="flat" cmpd="sng" algn="ctr">
+                      <a:solidFill>
+                        <a:srgbClr val="BFC5CC"/>
+                      </a:solidFill>
+                      <a:prstDash val="solid"/>
+                      <a:round/>
+                      <a:headEnd type="none" w="med" len="med"/>
+                      <a:tailEnd type="none" w="med" len="med"/>
+                    </a:lnT>
+                    <a:lnB w="9525" cap="flat" cmpd="sng" algn="ctr">
+                      <a:solidFill>
+                        <a:srgbClr val="BFC5CC"/>
+                      </a:solidFill>
+                      <a:prstDash val="solid"/>
+                      <a:round/>
+                      <a:headEnd type="none" w="med" len="med"/>
+                      <a:tailEnd type="none" w="med" len="med"/>
+                    </a:lnB>
+                    <a:solidFill>
+                      <a:schemeClr val="tx2"/>
+                    </a:solidFill>
+                  </a:tcPr>
+                </a:tc>
+                <a:extLst>
+                  <a:ext uri="{0D108BD9-81ED-4DB2-BD59-A6C34878D82A}">
+                    <a16:rowId xmlns:a16="http://schemas.microsoft.com/office/drawing/2014/main" val="10000"/>
+                  </a:ext>
+                </a:extLst>
+              </a:tr>
+              <a:tr h="475488">
+                <a:tc>
+                  <a:txBody>
+                    <a:bodyPr/>
+                    <a:lstStyle/>
+                    <a:p>
+                      <a:pPr marL="0" indent="0">
+                        <a:buNone/>
+                      </a:pPr>
+                      <a:r>
+                        <a:rPr lang="en-US" sz="1400" b="1" dirty="0">
+                          <a:solidFill>
+                            <a:schemeClr val="tx1"/>
+                          </a:solidFill>
+                          <a:latin typeface="Arial" pitchFamily="34" charset="0"/>
+                          <a:ea typeface="Arial" pitchFamily="34" charset="-122"/>
+                          <a:cs typeface="Arial" pitchFamily="34" charset="-120"/>
+                        </a:rPr>
+                        <a:t>Quadrate / Referenzpaare</a:t>
+                      </a:r>
+                      <a:endParaRPr lang="en-US" sz="1400" dirty="0">
+                        <a:latin typeface="Arial" charset="0"/>
+                        <a:ea typeface="Arial" charset="0"/>
+                        <a:cs typeface="Arial" charset="0"/>
+                      </a:endParaRPr>
+                    </a:p>
+                  </a:txBody>
+                  <a:tcPr marT="54864" marB="54864" anchor="ctr">
+                    <a:lnL w="9525" cap="flat" cmpd="sng" algn="ctr">
+                      <a:solidFill>
+                        <a:srgbClr val="BFC5CC"/>
+                      </a:solidFill>
+                      <a:prstDash val="solid"/>
+                      <a:round/>
+                      <a:headEnd type="none" w="med" len="med"/>
+                      <a:tailEnd type="none" w="med" len="med"/>
+                    </a:lnL>
+                    <a:lnR w="9525" cap="flat" cmpd="sng" algn="ctr">
+                      <a:solidFill>
+                        <a:srgbClr val="BFC5CC"/>
+                      </a:solidFill>
+                      <a:prstDash val="solid"/>
+                      <a:round/>
+                      <a:headEnd type="none" w="med" len="med"/>
+                      <a:tailEnd type="none" w="med" len="med"/>
+                    </a:lnR>
+                    <a:lnT w="9525" cap="flat" cmpd="sng" algn="ctr">
+                      <a:solidFill>
+                        <a:srgbClr val="BFC5CC"/>
+                      </a:solidFill>
+                      <a:prstDash val="solid"/>
+                      <a:round/>
+                      <a:headEnd type="none" w="med" len="med"/>
+                      <a:tailEnd type="none" w="med" len="med"/>
+                    </a:lnT>
+                    <a:lnB w="9525" cap="flat" cmpd="sng" algn="ctr">
+                      <a:solidFill>
+                        <a:srgbClr val="BFC5CC"/>
+                      </a:solidFill>
+                      <a:prstDash val="solid"/>
+                      <a:round/>
+                      <a:headEnd type="none" w="med" len="med"/>
+                      <a:tailEnd type="none" w="med" len="med"/>
+                    </a:lnB>
+                    <a:solidFill>
+                      <a:srgbClr val="F2F2F2"/>
+                    </a:solidFill>
+                  </a:tcPr>
+                </a:tc>
+                <a:tc>
+                  <a:txBody>
+                    <a:bodyPr/>
+                    <a:lstStyle/>
+                    <a:p>
+                      <a:pPr marL="0" indent="0">
+                        <a:buNone/>
+                      </a:pPr>
+                      <a:r>
+                        <a:rPr lang="en-US" sz="1400" dirty="0">
+                          <a:solidFill>
+                            <a:schemeClr val="tx1"/>
+                          </a:solidFill>
+                          <a:latin typeface="Arial" pitchFamily="34" charset="0"/>
+                          <a:ea typeface="Arial" pitchFamily="34" charset="-122"/>
+                          <a:cs typeface="Arial" pitchFamily="34" charset="-120"/>
+                        </a:rPr>
+                        <a:t>1'614 / 86'530</a:t>
+                      </a:r>
+                      <a:endParaRPr lang="en-US" sz="1400" dirty="0">
+                        <a:latin typeface="Arial" charset="0"/>
+                        <a:ea typeface="Arial" charset="0"/>
+                        <a:cs typeface="Arial" charset="0"/>
+                      </a:endParaRPr>
+                    </a:p>
+                  </a:txBody>
+                  <a:tcPr marT="54864" marB="54864" anchor="ctr">
+                    <a:lnL w="9525" cap="flat" cmpd="sng" algn="ctr">
+                      <a:solidFill>
+                        <a:srgbClr val="BFC5CC"/>
+                      </a:solidFill>
+                      <a:prstDash val="solid"/>
+                      <a:round/>
+                      <a:headEnd type="none" w="med" len="med"/>
+                      <a:tailEnd type="none" w="med" len="med"/>
+                    </a:lnL>
+                    <a:lnR w="9525" cap="flat" cmpd="sng" algn="ctr">
+                      <a:solidFill>
+                        <a:srgbClr val="BFC5CC"/>
+                      </a:solidFill>
+                      <a:prstDash val="solid"/>
+                      <a:round/>
+                      <a:headEnd type="none" w="med" len="med"/>
+                      <a:tailEnd type="none" w="med" len="med"/>
+                    </a:lnR>
+                    <a:lnT w="9525" cap="flat" cmpd="sng" algn="ctr">
+                      <a:solidFill>
+                        <a:srgbClr val="BFC5CC"/>
+                      </a:solidFill>
+                      <a:prstDash val="solid"/>
+                      <a:round/>
+                      <a:headEnd type="none" w="med" len="med"/>
+                      <a:tailEnd type="none" w="med" len="med"/>
+                    </a:lnT>
+                    <a:lnB w="9525" cap="flat" cmpd="sng" algn="ctr">
+                      <a:solidFill>
+                        <a:srgbClr val="BFC5CC"/>
+                      </a:solidFill>
+                      <a:prstDash val="solid"/>
+                      <a:round/>
+                      <a:headEnd type="none" w="med" len="med"/>
+                      <a:tailEnd type="none" w="med" len="med"/>
+                    </a:lnB>
+                  </a:tcPr>
+                </a:tc>
+                <a:tc>
+                  <a:txBody>
+                    <a:bodyPr/>
+                    <a:lstStyle/>
+                    <a:p>
+                      <a:pPr marL="0" indent="0">
+                        <a:buNone/>
+                      </a:pPr>
+                      <a:r>
+                        <a:rPr lang="en-US" sz="1400" dirty="0">
+                          <a:solidFill>
+                            <a:schemeClr val="tx1"/>
+                          </a:solidFill>
+                          <a:latin typeface="Arial" pitchFamily="34" charset="0"/>
+                          <a:ea typeface="Arial" pitchFamily="34" charset="-122"/>
+                          <a:cs typeface="Arial" pitchFamily="34" charset="-120"/>
+                        </a:rPr>
+                        <a:t>1'637 / 127'269</a:t>
+                      </a:r>
+                      <a:endParaRPr lang="en-US" sz="1400" dirty="0">
+                        <a:latin typeface="Arial" charset="0"/>
+                        <a:ea typeface="Arial" charset="0"/>
+                        <a:cs typeface="Arial" charset="0"/>
+                      </a:endParaRPr>
+                    </a:p>
+                  </a:txBody>
+                  <a:tcPr marT="54864" marB="54864" anchor="ctr">
+                    <a:lnL w="9525" cap="flat" cmpd="sng" algn="ctr">
+                      <a:solidFill>
+                        <a:srgbClr val="BFC5CC"/>
+                      </a:solidFill>
+                      <a:prstDash val="solid"/>
+                      <a:round/>
+                      <a:headEnd type="none" w="med" len="med"/>
+                      <a:tailEnd type="none" w="med" len="med"/>
+                    </a:lnL>
+                    <a:lnR w="9525" cap="flat" cmpd="sng" algn="ctr">
+                      <a:solidFill>
+                        <a:srgbClr val="BFC5CC"/>
+                      </a:solidFill>
+                      <a:prstDash val="solid"/>
+                      <a:round/>
+                      <a:headEnd type="none" w="med" len="med"/>
+                      <a:tailEnd type="none" w="med" len="med"/>
+                    </a:lnR>
+                    <a:lnT w="9525" cap="flat" cmpd="sng" algn="ctr">
+                      <a:solidFill>
+                        <a:srgbClr val="BFC5CC"/>
+                      </a:solidFill>
+                      <a:prstDash val="solid"/>
+                      <a:round/>
+                      <a:headEnd type="none" w="med" len="med"/>
+                      <a:tailEnd type="none" w="med" len="med"/>
+                    </a:lnT>
+                    <a:lnB w="9525" cap="flat" cmpd="sng" algn="ctr">
+                      <a:solidFill>
+                        <a:srgbClr val="BFC5CC"/>
+                      </a:solidFill>
+                      <a:prstDash val="solid"/>
+                      <a:round/>
+                      <a:headEnd type="none" w="med" len="med"/>
+                      <a:tailEnd type="none" w="med" len="med"/>
+                    </a:lnB>
+                  </a:tcPr>
+                </a:tc>
+                <a:tc>
+                  <a:txBody>
+                    <a:bodyPr/>
+                    <a:lstStyle/>
+                    <a:p>
+                      <a:pPr marL="0" indent="0">
+                        <a:buNone/>
+                      </a:pPr>
+                      <a:r>
+                        <a:rPr lang="en-US" sz="1400" dirty="0">
+                          <a:solidFill>
+                            <a:schemeClr val="tx1"/>
+                          </a:solidFill>
+                          <a:latin typeface="Arial" pitchFamily="34" charset="0"/>
+                          <a:ea typeface="Arial" pitchFamily="34" charset="-122"/>
+                          <a:cs typeface="Arial" pitchFamily="34" charset="-120"/>
+                        </a:rPr>
+                        <a:t>1'614 / 86'530</a:t>
+                      </a:r>
+                      <a:endParaRPr lang="en-US" sz="1400" dirty="0">
+                        <a:latin typeface="Arial" charset="0"/>
+                        <a:ea typeface="Arial" charset="0"/>
+                        <a:cs typeface="Arial" charset="0"/>
+                      </a:endParaRPr>
+                    </a:p>
+                  </a:txBody>
+                  <a:tcPr marT="54864" marB="54864" anchor="ctr">
+                    <a:lnL w="9525" cap="flat" cmpd="sng" algn="ctr">
+                      <a:solidFill>
+                        <a:srgbClr val="BFC5CC"/>
+                      </a:solidFill>
+                      <a:prstDash val="solid"/>
+                      <a:round/>
+                      <a:headEnd type="none" w="med" len="med"/>
+                      <a:tailEnd type="none" w="med" len="med"/>
+                    </a:lnL>
+                    <a:lnR w="9525" cap="flat" cmpd="sng" algn="ctr">
+                      <a:solidFill>
+                        <a:srgbClr val="BFC5CC"/>
+                      </a:solidFill>
+                      <a:prstDash val="solid"/>
+                      <a:round/>
+                      <a:headEnd type="none" w="med" len="med"/>
+                      <a:tailEnd type="none" w="med" len="med"/>
+                    </a:lnR>
+                    <a:lnT w="9525" cap="flat" cmpd="sng" algn="ctr">
+                      <a:solidFill>
+                        <a:srgbClr val="BFC5CC"/>
+                      </a:solidFill>
+                      <a:prstDash val="solid"/>
+                      <a:round/>
+                      <a:headEnd type="none" w="med" len="med"/>
+                      <a:tailEnd type="none" w="med" len="med"/>
+                    </a:lnT>
+                    <a:lnB w="9525" cap="flat" cmpd="sng" algn="ctr">
+                      <a:solidFill>
+                        <a:srgbClr val="BFC5CC"/>
+                      </a:solidFill>
+                      <a:prstDash val="solid"/>
+                      <a:round/>
+                      <a:headEnd type="none" w="med" len="med"/>
+                      <a:tailEnd type="none" w="med" len="med"/>
+                    </a:lnB>
+                  </a:tcPr>
+                </a:tc>
+                <a:extLst>
+                  <a:ext uri="{0D108BD9-81ED-4DB2-BD59-A6C34878D82A}">
+                    <a16:rowId xmlns:a16="http://schemas.microsoft.com/office/drawing/2014/main" val="10001"/>
+                  </a:ext>
+                </a:extLst>
+              </a:tr>
+              <a:tr h="475488">
+                <a:tc>
+                  <a:txBody>
+                    <a:bodyPr/>
+                    <a:lstStyle/>
+                    <a:p>
+                      <a:pPr marL="0" indent="0">
+                        <a:buNone/>
+                      </a:pPr>
+                      <a:r>
+                        <a:rPr lang="en-US" sz="1400" b="1" dirty="0">
+                          <a:solidFill>
+                            <a:schemeClr val="tx1"/>
+                          </a:solidFill>
+                          <a:latin typeface="Arial" pitchFamily="34" charset="0"/>
+                          <a:ea typeface="Arial" pitchFamily="34" charset="-122"/>
+                          <a:cs typeface="Arial" pitchFamily="34" charset="-120"/>
+                        </a:rPr>
+                        <a:t>mittlere Abdeckung</a:t>
+                      </a:r>
+                      <a:endParaRPr lang="en-US" sz="1400" dirty="0">
+                        <a:latin typeface="Arial" charset="0"/>
+                        <a:ea typeface="Arial" charset="0"/>
+                        <a:cs typeface="Arial" charset="0"/>
+                      </a:endParaRPr>
+                    </a:p>
+                  </a:txBody>
+                  <a:tcPr marT="54864" marB="54864" anchor="ctr">
+                    <a:lnL w="9525" cap="flat" cmpd="sng" algn="ctr">
+                      <a:solidFill>
+                        <a:srgbClr val="BFC5CC"/>
+                      </a:solidFill>
+                      <a:prstDash val="solid"/>
+                      <a:round/>
+                      <a:headEnd type="none" w="med" len="med"/>
+                      <a:tailEnd type="none" w="med" len="med"/>
+                    </a:lnL>
+                    <a:lnR w="9525" cap="flat" cmpd="sng" algn="ctr">
+                      <a:solidFill>
+                        <a:srgbClr val="BFC5CC"/>
+                      </a:solidFill>
+                      <a:prstDash val="solid"/>
+                      <a:round/>
+                      <a:headEnd type="none" w="med" len="med"/>
+                      <a:tailEnd type="none" w="med" len="med"/>
+                    </a:lnR>
+                    <a:lnT w="9525" cap="flat" cmpd="sng" algn="ctr">
+                      <a:solidFill>
+                        <a:srgbClr val="BFC5CC"/>
+                      </a:solidFill>
+                      <a:prstDash val="solid"/>
+                      <a:round/>
+                      <a:headEnd type="none" w="med" len="med"/>
+                      <a:tailEnd type="none" w="med" len="med"/>
+                    </a:lnT>
+                    <a:lnB w="9525" cap="flat" cmpd="sng" algn="ctr">
+                      <a:solidFill>
+                        <a:srgbClr val="BFC5CC"/>
+                      </a:solidFill>
+                      <a:prstDash val="solid"/>
+                      <a:round/>
+                      <a:headEnd type="none" w="med" len="med"/>
+                      <a:tailEnd type="none" w="med" len="med"/>
+                    </a:lnB>
+                    <a:solidFill>
+                      <a:srgbClr val="F2F2F2"/>
+                    </a:solidFill>
+                  </a:tcPr>
+                </a:tc>
+                <a:tc>
+                  <a:txBody>
+                    <a:bodyPr/>
+                    <a:lstStyle/>
+                    <a:p>
+                      <a:pPr marL="0" indent="0">
+                        <a:buNone/>
+                      </a:pPr>
+                      <a:r>
+                        <a:rPr lang="en-US" sz="1400" dirty="0">
+                          <a:solidFill>
+                            <a:schemeClr val="tx1"/>
+                          </a:solidFill>
+                          <a:latin typeface="Arial" pitchFamily="34" charset="0"/>
+                          <a:ea typeface="Arial" pitchFamily="34" charset="-122"/>
+                          <a:cs typeface="Arial" pitchFamily="34" charset="-120"/>
+                        </a:rPr>
+                        <a:t>39,9 %</a:t>
+                      </a:r>
+                      <a:endParaRPr lang="en-US" sz="1400" dirty="0">
+                        <a:latin typeface="Arial" charset="0"/>
+                        <a:ea typeface="Arial" charset="0"/>
+                        <a:cs typeface="Arial" charset="0"/>
+                      </a:endParaRPr>
+                    </a:p>
+                  </a:txBody>
+                  <a:tcPr marT="54864" marB="54864" anchor="ctr">
+                    <a:lnL w="9525" cap="flat" cmpd="sng" algn="ctr">
+                      <a:solidFill>
+                        <a:srgbClr val="BFC5CC"/>
+                      </a:solidFill>
+                      <a:prstDash val="solid"/>
+                      <a:round/>
+                      <a:headEnd type="none" w="med" len="med"/>
+                      <a:tailEnd type="none" w="med" len="med"/>
+                    </a:lnL>
+                    <a:lnR w="9525" cap="flat" cmpd="sng" algn="ctr">
+                      <a:solidFill>
+                        <a:srgbClr val="BFC5CC"/>
+                      </a:solidFill>
+                      <a:prstDash val="solid"/>
+                      <a:round/>
+                      <a:headEnd type="none" w="med" len="med"/>
+                      <a:tailEnd type="none" w="med" len="med"/>
+                    </a:lnR>
+                    <a:lnT w="9525" cap="flat" cmpd="sng" algn="ctr">
+                      <a:solidFill>
+                        <a:srgbClr val="BFC5CC"/>
+                      </a:solidFill>
+                      <a:prstDash val="solid"/>
+                      <a:round/>
+                      <a:headEnd type="none" w="med" len="med"/>
+                      <a:tailEnd type="none" w="med" len="med"/>
+                    </a:lnT>
+                    <a:lnB w="9525" cap="flat" cmpd="sng" algn="ctr">
+                      <a:solidFill>
+                        <a:srgbClr val="BFC5CC"/>
+                      </a:solidFill>
+                      <a:prstDash val="solid"/>
+                      <a:round/>
+                      <a:headEnd type="none" w="med" len="med"/>
+                      <a:tailEnd type="none" w="med" len="med"/>
+                    </a:lnB>
+                  </a:tcPr>
+                </a:tc>
+                <a:tc>
+                  <a:txBody>
+                    <a:bodyPr/>
+                    <a:lstStyle/>
+                    <a:p>
+                      <a:pPr marL="0" indent="0">
+                        <a:buNone/>
+                      </a:pPr>
+                      <a:r>
+                        <a:rPr lang="en-US" sz="1400" dirty="0">
+                          <a:solidFill>
+                            <a:schemeClr val="tx1"/>
+                          </a:solidFill>
+                          <a:latin typeface="Arial" pitchFamily="34" charset="0"/>
+                          <a:ea typeface="Arial" pitchFamily="34" charset="-122"/>
+                          <a:cs typeface="Arial" pitchFamily="34" charset="-120"/>
+                        </a:rPr>
+                        <a:t>32,6 %</a:t>
+                      </a:r>
+                      <a:endParaRPr lang="en-US" sz="1400" dirty="0">
+                        <a:latin typeface="Arial" charset="0"/>
+                        <a:ea typeface="Arial" charset="0"/>
+                        <a:cs typeface="Arial" charset="0"/>
+                      </a:endParaRPr>
+                    </a:p>
+                  </a:txBody>
+                  <a:tcPr marT="54864" marB="54864" anchor="ctr">
+                    <a:lnL w="9525" cap="flat" cmpd="sng" algn="ctr">
+                      <a:solidFill>
+                        <a:srgbClr val="BFC5CC"/>
+                      </a:solidFill>
+                      <a:prstDash val="solid"/>
+                      <a:round/>
+                      <a:headEnd type="none" w="med" len="med"/>
+                      <a:tailEnd type="none" w="med" len="med"/>
+                    </a:lnL>
+                    <a:lnR w="9525" cap="flat" cmpd="sng" algn="ctr">
+                      <a:solidFill>
+                        <a:srgbClr val="BFC5CC"/>
+                      </a:solidFill>
+                      <a:prstDash val="solid"/>
+                      <a:round/>
+                      <a:headEnd type="none" w="med" len="med"/>
+                      <a:tailEnd type="none" w="med" len="med"/>
+                    </a:lnR>
+                    <a:lnT w="9525" cap="flat" cmpd="sng" algn="ctr">
+                      <a:solidFill>
+                        <a:srgbClr val="BFC5CC"/>
+                      </a:solidFill>
+                      <a:prstDash val="solid"/>
+                      <a:round/>
+                      <a:headEnd type="none" w="med" len="med"/>
+                      <a:tailEnd type="none" w="med" len="med"/>
+                    </a:lnT>
+                    <a:lnB w="9525" cap="flat" cmpd="sng" algn="ctr">
+                      <a:solidFill>
+                        <a:srgbClr val="BFC5CC"/>
+                      </a:solidFill>
+                      <a:prstDash val="solid"/>
+                      <a:round/>
+                      <a:headEnd type="none" w="med" len="med"/>
+                      <a:tailEnd type="none" w="med" len="med"/>
+                    </a:lnB>
+                  </a:tcPr>
+                </a:tc>
+                <a:tc>
+                  <a:txBody>
+                    <a:bodyPr/>
+                    <a:lstStyle/>
+                    <a:p>
+                      <a:pPr marL="0" indent="0">
+                        <a:buNone/>
+                      </a:pPr>
+                      <a:r>
+                        <a:rPr lang="en-US" sz="1400" dirty="0">
+                          <a:solidFill>
+                            <a:schemeClr val="tx1"/>
+                          </a:solidFill>
+                          <a:latin typeface="Arial" pitchFamily="34" charset="0"/>
+                          <a:ea typeface="Arial" pitchFamily="34" charset="-122"/>
+                          <a:cs typeface="Arial" pitchFamily="34" charset="-120"/>
+                        </a:rPr>
+                        <a:t>39,9 %</a:t>
+                      </a:r>
+                      <a:endParaRPr lang="en-US" sz="1400" dirty="0">
+                        <a:latin typeface="Arial" charset="0"/>
+                        <a:ea typeface="Arial" charset="0"/>
+                        <a:cs typeface="Arial" charset="0"/>
+                      </a:endParaRPr>
+                    </a:p>
+                  </a:txBody>
+                  <a:tcPr marT="54864" marB="54864" anchor="ctr">
+                    <a:lnL w="9525" cap="flat" cmpd="sng" algn="ctr">
+                      <a:solidFill>
+                        <a:srgbClr val="BFC5CC"/>
+                      </a:solidFill>
+                      <a:prstDash val="solid"/>
+                      <a:round/>
+                      <a:headEnd type="none" w="med" len="med"/>
+                      <a:tailEnd type="none" w="med" len="med"/>
+                    </a:lnL>
+                    <a:lnR w="9525" cap="flat" cmpd="sng" algn="ctr">
+                      <a:solidFill>
+                        <a:srgbClr val="BFC5CC"/>
+                      </a:solidFill>
+                      <a:prstDash val="solid"/>
+                      <a:round/>
+                      <a:headEnd type="none" w="med" len="med"/>
+                      <a:tailEnd type="none" w="med" len="med"/>
+                    </a:lnR>
+                    <a:lnT w="9525" cap="flat" cmpd="sng" algn="ctr">
+                      <a:solidFill>
+                        <a:srgbClr val="BFC5CC"/>
+                      </a:solidFill>
+                      <a:prstDash val="solid"/>
+                      <a:round/>
+                      <a:headEnd type="none" w="med" len="med"/>
+                      <a:tailEnd type="none" w="med" len="med"/>
+                    </a:lnT>
+                    <a:lnB w="9525" cap="flat" cmpd="sng" algn="ctr">
+                      <a:solidFill>
+                        <a:srgbClr val="BFC5CC"/>
+                      </a:solidFill>
+                      <a:prstDash val="solid"/>
+                      <a:round/>
+                      <a:headEnd type="none" w="med" len="med"/>
+                      <a:tailEnd type="none" w="med" len="med"/>
+                    </a:lnB>
+                  </a:tcPr>
+                </a:tc>
+                <a:extLst>
+                  <a:ext uri="{0D108BD9-81ED-4DB2-BD59-A6C34878D82A}">
+                    <a16:rowId xmlns:a16="http://schemas.microsoft.com/office/drawing/2014/main" val="10002"/>
+                  </a:ext>
+                </a:extLst>
+              </a:tr>
+              <a:tr h="475488">
+                <a:tc>
+                  <a:txBody>
+                    <a:bodyPr/>
+                    <a:lstStyle/>
+                    <a:p>
+                      <a:pPr marL="0" indent="0">
+                        <a:buNone/>
+                      </a:pPr>
+                      <a:r>
+                        <a:rPr lang="en-US" sz="1400" b="1" dirty="0">
+                          <a:solidFill>
+                            <a:schemeClr val="tx1"/>
+                          </a:solidFill>
+                          <a:latin typeface="Arial" pitchFamily="34" charset="0"/>
+                          <a:ea typeface="Arial" pitchFamily="34" charset="-122"/>
+                          <a:cs typeface="Arial" pitchFamily="34" charset="-120"/>
+                        </a:rPr>
+                        <a:t>H1 Spearman rho</a:t>
+                      </a:r>
+                      <a:endParaRPr lang="en-US" sz="1400" dirty="0">
+                        <a:latin typeface="Arial" charset="0"/>
+                        <a:ea typeface="Arial" charset="0"/>
+                        <a:cs typeface="Arial" charset="0"/>
+                      </a:endParaRPr>
+                    </a:p>
+                  </a:txBody>
+                  <a:tcPr marT="54864" marB="54864" anchor="ctr">
+                    <a:lnL w="9525" cap="flat" cmpd="sng" algn="ctr">
+                      <a:solidFill>
+                        <a:srgbClr val="BFC5CC"/>
+                      </a:solidFill>
+                      <a:prstDash val="solid"/>
+                      <a:round/>
+                      <a:headEnd type="none" w="med" len="med"/>
+                      <a:tailEnd type="none" w="med" len="med"/>
+                    </a:lnL>
+                    <a:lnR w="9525" cap="flat" cmpd="sng" algn="ctr">
+                      <a:solidFill>
+                        <a:srgbClr val="BFC5CC"/>
+                      </a:solidFill>
+                      <a:prstDash val="solid"/>
+                      <a:round/>
+                      <a:headEnd type="none" w="med" len="med"/>
+                      <a:tailEnd type="none" w="med" len="med"/>
+                    </a:lnR>
+                    <a:lnT w="9525" cap="flat" cmpd="sng" algn="ctr">
+                      <a:solidFill>
+                        <a:srgbClr val="BFC5CC"/>
+                      </a:solidFill>
+                      <a:prstDash val="solid"/>
+                      <a:round/>
+                      <a:headEnd type="none" w="med" len="med"/>
+                      <a:tailEnd type="none" w="med" len="med"/>
+                    </a:lnT>
+                    <a:lnB w="9525" cap="flat" cmpd="sng" algn="ctr">
+                      <a:solidFill>
+                        <a:srgbClr val="BFC5CC"/>
+                      </a:solidFill>
+                      <a:prstDash val="solid"/>
+                      <a:round/>
+                      <a:headEnd type="none" w="med" len="med"/>
+                      <a:tailEnd type="none" w="med" len="med"/>
+                    </a:lnB>
+                    <a:solidFill>
+                      <a:srgbClr val="F2F2F2"/>
+                    </a:solidFill>
+                  </a:tcPr>
+                </a:tc>
+                <a:tc>
+                  <a:txBody>
+                    <a:bodyPr/>
+                    <a:lstStyle/>
+                    <a:p>
+                      <a:pPr marL="0" indent="0">
+                        <a:buNone/>
+                      </a:pPr>
+                      <a:r>
+                        <a:rPr lang="en-US" sz="1400" dirty="0">
+                          <a:solidFill>
+                            <a:schemeClr val="tx1"/>
+                          </a:solidFill>
+                          <a:latin typeface="Arial" pitchFamily="34" charset="0"/>
+                          <a:ea typeface="Arial" pitchFamily="34" charset="-122"/>
+                          <a:cs typeface="Arial" pitchFamily="34" charset="-120"/>
+                        </a:rPr>
+                        <a:t>0,338</a:t>
+                      </a:r>
+                      <a:endParaRPr lang="en-US" sz="1400" dirty="0">
+                        <a:latin typeface="Arial" charset="0"/>
+                        <a:ea typeface="Arial" charset="0"/>
+                        <a:cs typeface="Arial" charset="0"/>
+                      </a:endParaRPr>
+                    </a:p>
+                  </a:txBody>
+                  <a:tcPr marT="54864" marB="54864" anchor="ctr">
+                    <a:lnL w="9525" cap="flat" cmpd="sng" algn="ctr">
+                      <a:solidFill>
+                        <a:srgbClr val="BFC5CC"/>
+                      </a:solidFill>
+                      <a:prstDash val="solid"/>
+                      <a:round/>
+                      <a:headEnd type="none" w="med" len="med"/>
+                      <a:tailEnd type="none" w="med" len="med"/>
+                    </a:lnL>
+                    <a:lnR w="9525" cap="flat" cmpd="sng" algn="ctr">
+                      <a:solidFill>
+                        <a:srgbClr val="BFC5CC"/>
+                      </a:solidFill>
+                      <a:prstDash val="solid"/>
+                      <a:round/>
+                      <a:headEnd type="none" w="med" len="med"/>
+                      <a:tailEnd type="none" w="med" len="med"/>
+                    </a:lnR>
+                    <a:lnT w="9525" cap="flat" cmpd="sng" algn="ctr">
+                      <a:solidFill>
+                        <a:srgbClr val="BFC5CC"/>
+                      </a:solidFill>
+                      <a:prstDash val="solid"/>
+                      <a:round/>
+                      <a:headEnd type="none" w="med" len="med"/>
+                      <a:tailEnd type="none" w="med" len="med"/>
+                    </a:lnT>
+                    <a:lnB w="9525" cap="flat" cmpd="sng" algn="ctr">
+                      <a:solidFill>
+                        <a:srgbClr val="BFC5CC"/>
+                      </a:solidFill>
+                      <a:prstDash val="solid"/>
+                      <a:round/>
+                      <a:headEnd type="none" w="med" len="med"/>
+                      <a:tailEnd type="none" w="med" len="med"/>
+                    </a:lnB>
+                  </a:tcPr>
+                </a:tc>
+                <a:tc>
+                  <a:txBody>
+                    <a:bodyPr/>
+                    <a:lstStyle/>
+                    <a:p>
+                      <a:pPr marL="0" indent="0">
+                        <a:buNone/>
+                      </a:pPr>
+                      <a:r>
+                        <a:rPr lang="en-US" sz="1400" dirty="0">
+                          <a:solidFill>
+                            <a:schemeClr val="tx1"/>
+                          </a:solidFill>
+                          <a:latin typeface="Arial" pitchFamily="34" charset="0"/>
+                          <a:ea typeface="Arial" pitchFamily="34" charset="-122"/>
+                          <a:cs typeface="Arial" pitchFamily="34" charset="-120"/>
+                        </a:rPr>
+                        <a:t>0,368</a:t>
+                      </a:r>
+                      <a:endParaRPr lang="en-US" sz="1400" dirty="0">
+                        <a:latin typeface="Arial" charset="0"/>
+                        <a:ea typeface="Arial" charset="0"/>
+                        <a:cs typeface="Arial" charset="0"/>
+                      </a:endParaRPr>
+                    </a:p>
+                  </a:txBody>
+                  <a:tcPr marT="54864" marB="54864" anchor="ctr">
+                    <a:lnL w="9525" cap="flat" cmpd="sng" algn="ctr">
+                      <a:solidFill>
+                        <a:srgbClr val="BFC5CC"/>
+                      </a:solidFill>
+                      <a:prstDash val="solid"/>
+                      <a:round/>
+                      <a:headEnd type="none" w="med" len="med"/>
+                      <a:tailEnd type="none" w="med" len="med"/>
+                    </a:lnL>
+                    <a:lnR w="9525" cap="flat" cmpd="sng" algn="ctr">
+                      <a:solidFill>
+                        <a:srgbClr val="BFC5CC"/>
+                      </a:solidFill>
+                      <a:prstDash val="solid"/>
+                      <a:round/>
+                      <a:headEnd type="none" w="med" len="med"/>
+                      <a:tailEnd type="none" w="med" len="med"/>
+                    </a:lnR>
+                    <a:lnT w="9525" cap="flat" cmpd="sng" algn="ctr">
+                      <a:solidFill>
+                        <a:srgbClr val="BFC5CC"/>
+                      </a:solidFill>
+                      <a:prstDash val="solid"/>
+                      <a:round/>
+                      <a:headEnd type="none" w="med" len="med"/>
+                      <a:tailEnd type="none" w="med" len="med"/>
+                    </a:lnT>
+                    <a:lnB w="9525" cap="flat" cmpd="sng" algn="ctr">
+                      <a:solidFill>
+                        <a:srgbClr val="BFC5CC"/>
+                      </a:solidFill>
+                      <a:prstDash val="solid"/>
+                      <a:round/>
+                      <a:headEnd type="none" w="med" len="med"/>
+                      <a:tailEnd type="none" w="med" len="med"/>
+                    </a:lnB>
+                  </a:tcPr>
+                </a:tc>
+                <a:tc>
+                  <a:txBody>
+                    <a:bodyPr/>
+                    <a:lstStyle/>
+                    <a:p>
+                      <a:pPr marL="0" indent="0">
+                        <a:buNone/>
+                      </a:pPr>
+                      <a:r>
+                        <a:rPr lang="en-US" sz="1400" dirty="0">
+                          <a:solidFill>
+                            <a:schemeClr val="tx1"/>
+                          </a:solidFill>
+                          <a:latin typeface="Arial" pitchFamily="34" charset="0"/>
+                          <a:ea typeface="Arial" pitchFamily="34" charset="-122"/>
+                          <a:cs typeface="Arial" pitchFamily="34" charset="-120"/>
+                        </a:rPr>
+                        <a:t>0,339</a:t>
+                      </a:r>
+                      <a:endParaRPr lang="en-US" sz="1400" dirty="0">
+                        <a:latin typeface="Arial" charset="0"/>
+                        <a:ea typeface="Arial" charset="0"/>
+                        <a:cs typeface="Arial" charset="0"/>
+                      </a:endParaRPr>
+                    </a:p>
+                  </a:txBody>
+                  <a:tcPr marT="54864" marB="54864" anchor="ctr">
+                    <a:lnL w="9525" cap="flat" cmpd="sng" algn="ctr">
+                      <a:solidFill>
+                        <a:srgbClr val="BFC5CC"/>
+                      </a:solidFill>
+                      <a:prstDash val="solid"/>
+                      <a:round/>
+                      <a:headEnd type="none" w="med" len="med"/>
+                      <a:tailEnd type="none" w="med" len="med"/>
+                    </a:lnL>
+                    <a:lnR w="9525" cap="flat" cmpd="sng" algn="ctr">
+                      <a:solidFill>
+                        <a:srgbClr val="BFC5CC"/>
+                      </a:solidFill>
+                      <a:prstDash val="solid"/>
+                      <a:round/>
+                      <a:headEnd type="none" w="med" len="med"/>
+                      <a:tailEnd type="none" w="med" len="med"/>
+                    </a:lnR>
+                    <a:lnT w="9525" cap="flat" cmpd="sng" algn="ctr">
+                      <a:solidFill>
+                        <a:srgbClr val="BFC5CC"/>
+                      </a:solidFill>
+                      <a:prstDash val="solid"/>
+                      <a:round/>
+                      <a:headEnd type="none" w="med" len="med"/>
+                      <a:tailEnd type="none" w="med" len="med"/>
+                    </a:lnT>
+                    <a:lnB w="9525" cap="flat" cmpd="sng" algn="ctr">
+                      <a:solidFill>
+                        <a:srgbClr val="BFC5CC"/>
+                      </a:solidFill>
+                      <a:prstDash val="solid"/>
+                      <a:round/>
+                      <a:headEnd type="none" w="med" len="med"/>
+                      <a:tailEnd type="none" w="med" len="med"/>
+                    </a:lnB>
+                  </a:tcPr>
+                </a:tc>
+                <a:extLst>
+                  <a:ext uri="{0D108BD9-81ED-4DB2-BD59-A6C34878D82A}">
+                    <a16:rowId xmlns:a16="http://schemas.microsoft.com/office/drawing/2014/main" val="10003"/>
+                  </a:ext>
+                </a:extLst>
+              </a:tr>
+              <a:tr h="475488">
+                <a:tc>
+                  <a:txBody>
+                    <a:bodyPr/>
+                    <a:lstStyle/>
+                    <a:p>
+                      <a:pPr marL="0" indent="0">
+                        <a:buNone/>
+                      </a:pPr>
+                      <a:r>
+                        <a:rPr lang="en-US" sz="1400" b="1" dirty="0">
+                          <a:solidFill>
+                            <a:schemeClr val="tx1"/>
+                          </a:solidFill>
+                          <a:latin typeface="Arial" pitchFamily="34" charset="0"/>
+                          <a:ea typeface="Arial" pitchFamily="34" charset="-122"/>
+                          <a:cs typeface="Arial" pitchFamily="34" charset="-120"/>
+                        </a:rPr>
+                        <a:t>H2 Spearman rho</a:t>
+                      </a:r>
+                      <a:endParaRPr lang="en-US" sz="1400" dirty="0">
+                        <a:latin typeface="Arial" charset="0"/>
+                        <a:ea typeface="Arial" charset="0"/>
+                        <a:cs typeface="Arial" charset="0"/>
+                      </a:endParaRPr>
+                    </a:p>
+                  </a:txBody>
+                  <a:tcPr marT="54864" marB="54864" anchor="ctr">
+                    <a:lnL w="9525" cap="flat" cmpd="sng" algn="ctr">
+                      <a:solidFill>
+                        <a:srgbClr val="BFC5CC"/>
+                      </a:solidFill>
+                      <a:prstDash val="solid"/>
+                      <a:round/>
+                      <a:headEnd type="none" w="med" len="med"/>
+                      <a:tailEnd type="none" w="med" len="med"/>
+                    </a:lnL>
+                    <a:lnR w="9525" cap="flat" cmpd="sng" algn="ctr">
+                      <a:solidFill>
+                        <a:srgbClr val="BFC5CC"/>
+                      </a:solidFill>
+                      <a:prstDash val="solid"/>
+                      <a:round/>
+                      <a:headEnd type="none" w="med" len="med"/>
+                      <a:tailEnd type="none" w="med" len="med"/>
+                    </a:lnR>
+                    <a:lnT w="9525" cap="flat" cmpd="sng" algn="ctr">
+                      <a:solidFill>
+                        <a:srgbClr val="BFC5CC"/>
+                      </a:solidFill>
+                      <a:prstDash val="solid"/>
+                      <a:round/>
+                      <a:headEnd type="none" w="med" len="med"/>
+                      <a:tailEnd type="none" w="med" len="med"/>
+                    </a:lnT>
+                    <a:lnB w="9525" cap="flat" cmpd="sng" algn="ctr">
+                      <a:solidFill>
+                        <a:srgbClr val="BFC5CC"/>
+                      </a:solidFill>
+                      <a:prstDash val="solid"/>
+                      <a:round/>
+                      <a:headEnd type="none" w="med" len="med"/>
+                      <a:tailEnd type="none" w="med" len="med"/>
+                    </a:lnB>
+                    <a:solidFill>
+                      <a:srgbClr val="F2F2F2"/>
+                    </a:solidFill>
+                  </a:tcPr>
+                </a:tc>
+                <a:tc>
+                  <a:txBody>
+                    <a:bodyPr/>
+                    <a:lstStyle/>
+                    <a:p>
+                      <a:pPr marL="0" indent="0">
+                        <a:buNone/>
+                      </a:pPr>
+                      <a:r>
+                        <a:rPr lang="en-US" sz="1400" dirty="0">
+                          <a:solidFill>
+                            <a:schemeClr val="tx1"/>
+                          </a:solidFill>
+                          <a:latin typeface="Arial" pitchFamily="34" charset="0"/>
+                          <a:ea typeface="Arial" pitchFamily="34" charset="-122"/>
+                          <a:cs typeface="Arial" pitchFamily="34" charset="-120"/>
+                        </a:rPr>
+                        <a:t>−0,001</a:t>
+                      </a:r>
+                      <a:endParaRPr lang="en-US" sz="1400" dirty="0">
+                        <a:latin typeface="Arial" charset="0"/>
+                        <a:ea typeface="Arial" charset="0"/>
+                        <a:cs typeface="Arial" charset="0"/>
+                      </a:endParaRPr>
+                    </a:p>
+                  </a:txBody>
+                  <a:tcPr marT="54864" marB="54864" anchor="ctr">
+                    <a:lnL w="9525" cap="flat" cmpd="sng" algn="ctr">
+                      <a:solidFill>
+                        <a:srgbClr val="BFC5CC"/>
+                      </a:solidFill>
+                      <a:prstDash val="solid"/>
+                      <a:round/>
+                      <a:headEnd type="none" w="med" len="med"/>
+                      <a:tailEnd type="none" w="med" len="med"/>
+                    </a:lnL>
+                    <a:lnR w="9525" cap="flat" cmpd="sng" algn="ctr">
+                      <a:solidFill>
+                        <a:srgbClr val="BFC5CC"/>
+                      </a:solidFill>
+                      <a:prstDash val="solid"/>
+                      <a:round/>
+                      <a:headEnd type="none" w="med" len="med"/>
+                      <a:tailEnd type="none" w="med" len="med"/>
+                    </a:lnR>
+                    <a:lnT w="9525" cap="flat" cmpd="sng" algn="ctr">
+                      <a:solidFill>
+                        <a:srgbClr val="BFC5CC"/>
+                      </a:solidFill>
+                      <a:prstDash val="solid"/>
+                      <a:round/>
+                      <a:headEnd type="none" w="med" len="med"/>
+                      <a:tailEnd type="none" w="med" len="med"/>
+                    </a:lnT>
+                    <a:lnB w="9525" cap="flat" cmpd="sng" algn="ctr">
+                      <a:solidFill>
+                        <a:srgbClr val="BFC5CC"/>
+                      </a:solidFill>
+                      <a:prstDash val="solid"/>
+                      <a:round/>
+                      <a:headEnd type="none" w="med" len="med"/>
+                      <a:tailEnd type="none" w="med" len="med"/>
+                    </a:lnB>
+                  </a:tcPr>
+                </a:tc>
+                <a:tc>
+                  <a:txBody>
+                    <a:bodyPr/>
+                    <a:lstStyle/>
+                    <a:p>
+                      <a:pPr marL="0" indent="0">
+                        <a:buNone/>
+                      </a:pPr>
+                      <a:r>
+                        <a:rPr lang="en-US" sz="1400" dirty="0">
+                          <a:solidFill>
+                            <a:schemeClr val="tx1"/>
+                          </a:solidFill>
+                          <a:latin typeface="Arial" pitchFamily="34" charset="0"/>
+                          <a:ea typeface="Arial" pitchFamily="34" charset="-122"/>
+                          <a:cs typeface="Arial" pitchFamily="34" charset="-120"/>
+                        </a:rPr>
+                        <a:t>−0,042</a:t>
+                      </a:r>
+                      <a:endParaRPr lang="en-US" sz="1400" dirty="0">
+                        <a:latin typeface="Arial" charset="0"/>
+                        <a:ea typeface="Arial" charset="0"/>
+                        <a:cs typeface="Arial" charset="0"/>
+                      </a:endParaRPr>
+                    </a:p>
+                  </a:txBody>
+                  <a:tcPr marT="54864" marB="54864" anchor="ctr">
+                    <a:lnL w="9525" cap="flat" cmpd="sng" algn="ctr">
+                      <a:solidFill>
+                        <a:srgbClr val="BFC5CC"/>
+                      </a:solidFill>
+                      <a:prstDash val="solid"/>
+                      <a:round/>
+                      <a:headEnd type="none" w="med" len="med"/>
+                      <a:tailEnd type="none" w="med" len="med"/>
+                    </a:lnL>
+                    <a:lnR w="9525" cap="flat" cmpd="sng" algn="ctr">
+                      <a:solidFill>
+                        <a:srgbClr val="BFC5CC"/>
+                      </a:solidFill>
+                      <a:prstDash val="solid"/>
+                      <a:round/>
+                      <a:headEnd type="none" w="med" len="med"/>
+                      <a:tailEnd type="none" w="med" len="med"/>
+                    </a:lnR>
+                    <a:lnT w="9525" cap="flat" cmpd="sng" algn="ctr">
+                      <a:solidFill>
+                        <a:srgbClr val="BFC5CC"/>
+                      </a:solidFill>
+                      <a:prstDash val="solid"/>
+                      <a:round/>
+                      <a:headEnd type="none" w="med" len="med"/>
+                      <a:tailEnd type="none" w="med" len="med"/>
+                    </a:lnT>
+                    <a:lnB w="9525" cap="flat" cmpd="sng" algn="ctr">
+                      <a:solidFill>
+                        <a:srgbClr val="BFC5CC"/>
+                      </a:solidFill>
+                      <a:prstDash val="solid"/>
+                      <a:round/>
+                      <a:headEnd type="none" w="med" len="med"/>
+                      <a:tailEnd type="none" w="med" len="med"/>
+                    </a:lnB>
+                  </a:tcPr>
+                </a:tc>
+                <a:tc>
+                  <a:txBody>
+                    <a:bodyPr/>
+                    <a:lstStyle/>
+                    <a:p>
+                      <a:pPr marL="0" indent="0">
+                        <a:buNone/>
+                      </a:pPr>
+                      <a:r>
+                        <a:rPr lang="en-US" sz="1400" dirty="0">
+                          <a:solidFill>
+                            <a:schemeClr val="tx1"/>
+                          </a:solidFill>
+                          <a:latin typeface="Arial" pitchFamily="34" charset="0"/>
+                          <a:ea typeface="Arial" pitchFamily="34" charset="-122"/>
+                          <a:cs typeface="Arial" pitchFamily="34" charset="-120"/>
+                        </a:rPr>
+                        <a:t>−0,001</a:t>
+                      </a:r>
+                      <a:endParaRPr lang="en-US" sz="1400" dirty="0">
+                        <a:latin typeface="Arial" charset="0"/>
+                        <a:ea typeface="Arial" charset="0"/>
+                        <a:cs typeface="Arial" charset="0"/>
+                      </a:endParaRPr>
+                    </a:p>
+                  </a:txBody>
+                  <a:tcPr marT="54864" marB="54864" anchor="ctr">
+                    <a:lnL w="9525" cap="flat" cmpd="sng" algn="ctr">
+                      <a:solidFill>
+                        <a:srgbClr val="BFC5CC"/>
+                      </a:solidFill>
+                      <a:prstDash val="solid"/>
+                      <a:round/>
+                      <a:headEnd type="none" w="med" len="med"/>
+                      <a:tailEnd type="none" w="med" len="med"/>
+                    </a:lnL>
+                    <a:lnR w="9525" cap="flat" cmpd="sng" algn="ctr">
+                      <a:solidFill>
+                        <a:srgbClr val="BFC5CC"/>
+                      </a:solidFill>
+                      <a:prstDash val="solid"/>
+                      <a:round/>
+                      <a:headEnd type="none" w="med" len="med"/>
+                      <a:tailEnd type="none" w="med" len="med"/>
+                    </a:lnR>
+                    <a:lnT w="9525" cap="flat" cmpd="sng" algn="ctr">
+                      <a:solidFill>
+                        <a:srgbClr val="BFC5CC"/>
+                      </a:solidFill>
+                      <a:prstDash val="solid"/>
+                      <a:round/>
+                      <a:headEnd type="none" w="med" len="med"/>
+                      <a:tailEnd type="none" w="med" len="med"/>
+                    </a:lnT>
+                    <a:lnB w="9525" cap="flat" cmpd="sng" algn="ctr">
+                      <a:solidFill>
+                        <a:srgbClr val="BFC5CC"/>
+                      </a:solidFill>
+                      <a:prstDash val="solid"/>
+                      <a:round/>
+                      <a:headEnd type="none" w="med" len="med"/>
+                      <a:tailEnd type="none" w="med" len="med"/>
+                    </a:lnB>
+                  </a:tcPr>
+                </a:tc>
+                <a:extLst>
+                  <a:ext uri="{0D108BD9-81ED-4DB2-BD59-A6C34878D82A}">
+                    <a16:rowId xmlns:a16="http://schemas.microsoft.com/office/drawing/2014/main" val="10004"/>
+                  </a:ext>
+                </a:extLst>
+              </a:tr>
+              <a:tr h="475488">
+                <a:tc>
+                  <a:txBody>
+                    <a:bodyPr/>
+                    <a:lstStyle/>
+                    <a:p>
+                      <a:pPr marL="0" indent="0">
+                        <a:buNone/>
+                      </a:pPr>
+                      <a:r>
+                        <a:rPr lang="en-US" sz="1400" b="1" dirty="0">
+                          <a:solidFill>
+                            <a:schemeClr val="tx1"/>
+                          </a:solidFill>
+                          <a:latin typeface="Arial" pitchFamily="34" charset="0"/>
+                          <a:ea typeface="Arial" pitchFamily="34" charset="-122"/>
+                          <a:cs typeface="Arial" pitchFamily="34" charset="-120"/>
+                        </a:rPr>
+                        <a:t>H3 Interaktion, primär</a:t>
+                      </a:r>
+                      <a:endParaRPr lang="en-US" sz="1400" dirty="0">
+                        <a:latin typeface="Arial" charset="0"/>
+                        <a:ea typeface="Arial" charset="0"/>
+                        <a:cs typeface="Arial" charset="0"/>
+                      </a:endParaRPr>
+                    </a:p>
+                  </a:txBody>
+                  <a:tcPr marT="54864" marB="54864" anchor="ctr">
+                    <a:lnL w="9525" cap="flat" cmpd="sng" algn="ctr">
+                      <a:solidFill>
+                        <a:srgbClr val="BFC5CC"/>
+                      </a:solidFill>
+                      <a:prstDash val="solid"/>
+                      <a:round/>
+                      <a:headEnd type="none" w="med" len="med"/>
+                      <a:tailEnd type="none" w="med" len="med"/>
+                    </a:lnL>
+                    <a:lnR w="9525" cap="flat" cmpd="sng" algn="ctr">
+                      <a:solidFill>
+                        <a:srgbClr val="BFC5CC"/>
+                      </a:solidFill>
+                      <a:prstDash val="solid"/>
+                      <a:round/>
+                      <a:headEnd type="none" w="med" len="med"/>
+                      <a:tailEnd type="none" w="med" len="med"/>
+                    </a:lnR>
+                    <a:lnT w="9525" cap="flat" cmpd="sng" algn="ctr">
+                      <a:solidFill>
+                        <a:srgbClr val="BFC5CC"/>
+                      </a:solidFill>
+                      <a:prstDash val="solid"/>
+                      <a:round/>
+                      <a:headEnd type="none" w="med" len="med"/>
+                      <a:tailEnd type="none" w="med" len="med"/>
+                    </a:lnT>
+                    <a:lnB w="9525" cap="flat" cmpd="sng" algn="ctr">
+                      <a:solidFill>
+                        <a:srgbClr val="BFC5CC"/>
+                      </a:solidFill>
+                      <a:prstDash val="solid"/>
+                      <a:round/>
+                      <a:headEnd type="none" w="med" len="med"/>
+                      <a:tailEnd type="none" w="med" len="med"/>
+                    </a:lnB>
+                    <a:solidFill>
+                      <a:srgbClr val="F2F2F2"/>
+                    </a:solidFill>
+                  </a:tcPr>
+                </a:tc>
+                <a:tc>
+                  <a:txBody>
+                    <a:bodyPr/>
+                    <a:lstStyle/>
+                    <a:p>
+                      <a:pPr marL="0" indent="0">
+                        <a:buNone/>
+                      </a:pPr>
+                      <a:r>
+                        <a:rPr lang="en-US" sz="1400" dirty="0">
+                          <a:solidFill>
+                            <a:schemeClr val="tx1"/>
+                          </a:solidFill>
+                          <a:latin typeface="Arial" pitchFamily="34" charset="0"/>
+                          <a:ea typeface="Arial" pitchFamily="34" charset="-122"/>
+                          <a:cs typeface="Arial" pitchFamily="34" charset="-120"/>
+                        </a:rPr>
+                        <a:t>+0,235</a:t>
+                      </a:r>
+                      <a:endParaRPr lang="en-US" sz="1400" dirty="0">
+                        <a:latin typeface="Arial" charset="0"/>
+                        <a:ea typeface="Arial" charset="0"/>
+                        <a:cs typeface="Arial" charset="0"/>
+                      </a:endParaRPr>
+                    </a:p>
+                  </a:txBody>
+                  <a:tcPr marT="54864" marB="54864" anchor="ctr">
+                    <a:lnL w="9525" cap="flat" cmpd="sng" algn="ctr">
+                      <a:solidFill>
+                        <a:srgbClr val="BFC5CC"/>
+                      </a:solidFill>
+                      <a:prstDash val="solid"/>
+                      <a:round/>
+                      <a:headEnd type="none" w="med" len="med"/>
+                      <a:tailEnd type="none" w="med" len="med"/>
+                    </a:lnL>
+                    <a:lnR w="9525" cap="flat" cmpd="sng" algn="ctr">
+                      <a:solidFill>
+                        <a:srgbClr val="BFC5CC"/>
+                      </a:solidFill>
+                      <a:prstDash val="solid"/>
+                      <a:round/>
+                      <a:headEnd type="none" w="med" len="med"/>
+                      <a:tailEnd type="none" w="med" len="med"/>
+                    </a:lnR>
+                    <a:lnT w="9525" cap="flat" cmpd="sng" algn="ctr">
+                      <a:solidFill>
+                        <a:srgbClr val="BFC5CC"/>
+                      </a:solidFill>
+                      <a:prstDash val="solid"/>
+                      <a:round/>
+                      <a:headEnd type="none" w="med" len="med"/>
+                      <a:tailEnd type="none" w="med" len="med"/>
+                    </a:lnT>
+                    <a:lnB w="9525" cap="flat" cmpd="sng" algn="ctr">
+                      <a:solidFill>
+                        <a:srgbClr val="BFC5CC"/>
+                      </a:solidFill>
+                      <a:prstDash val="solid"/>
+                      <a:round/>
+                      <a:headEnd type="none" w="med" len="med"/>
+                      <a:tailEnd type="none" w="med" len="med"/>
+                    </a:lnB>
+                  </a:tcPr>
+                </a:tc>
+                <a:tc>
+                  <a:txBody>
+                    <a:bodyPr/>
+                    <a:lstStyle/>
+                    <a:p>
+                      <a:pPr marL="0" indent="0">
+                        <a:buNone/>
+                      </a:pPr>
+                      <a:r>
+                        <a:rPr lang="en-US" sz="1400" dirty="0">
+                          <a:solidFill>
+                            <a:schemeClr val="tx1"/>
+                          </a:solidFill>
+                          <a:latin typeface="Arial" pitchFamily="34" charset="0"/>
+                          <a:ea typeface="Arial" pitchFamily="34" charset="-122"/>
+                          <a:cs typeface="Arial" pitchFamily="34" charset="-120"/>
+                        </a:rPr>
+                        <a:t>+0,204</a:t>
+                      </a:r>
+                      <a:endParaRPr lang="en-US" sz="1400" dirty="0">
+                        <a:latin typeface="Arial" charset="0"/>
+                        <a:ea typeface="Arial" charset="0"/>
+                        <a:cs typeface="Arial" charset="0"/>
+                      </a:endParaRPr>
+                    </a:p>
+                  </a:txBody>
+                  <a:tcPr marT="54864" marB="54864" anchor="ctr">
+                    <a:lnL w="9525" cap="flat" cmpd="sng" algn="ctr">
+                      <a:solidFill>
+                        <a:srgbClr val="BFC5CC"/>
+                      </a:solidFill>
+                      <a:prstDash val="solid"/>
+                      <a:round/>
+                      <a:headEnd type="none" w="med" len="med"/>
+                      <a:tailEnd type="none" w="med" len="med"/>
+                    </a:lnL>
+                    <a:lnR w="9525" cap="flat" cmpd="sng" algn="ctr">
+                      <a:solidFill>
+                        <a:srgbClr val="BFC5CC"/>
+                      </a:solidFill>
+                      <a:prstDash val="solid"/>
+                      <a:round/>
+                      <a:headEnd type="none" w="med" len="med"/>
+                      <a:tailEnd type="none" w="med" len="med"/>
+                    </a:lnR>
+                    <a:lnT w="9525" cap="flat" cmpd="sng" algn="ctr">
+                      <a:solidFill>
+                        <a:srgbClr val="BFC5CC"/>
+                      </a:solidFill>
+                      <a:prstDash val="solid"/>
+                      <a:round/>
+                      <a:headEnd type="none" w="med" len="med"/>
+                      <a:tailEnd type="none" w="med" len="med"/>
+                    </a:lnT>
+                    <a:lnB w="9525" cap="flat" cmpd="sng" algn="ctr">
+                      <a:solidFill>
+                        <a:srgbClr val="BFC5CC"/>
+                      </a:solidFill>
+                      <a:prstDash val="solid"/>
+                      <a:round/>
+                      <a:headEnd type="none" w="med" len="med"/>
+                      <a:tailEnd type="none" w="med" len="med"/>
+                    </a:lnB>
+                  </a:tcPr>
+                </a:tc>
+                <a:tc>
+                  <a:txBody>
+                    <a:bodyPr/>
+                    <a:lstStyle/>
+                    <a:p>
+                      <a:pPr marL="0" indent="0">
+                        <a:buNone/>
+                      </a:pPr>
+                      <a:r>
+                        <a:rPr lang="en-US" sz="1400" dirty="0">
+                          <a:solidFill>
+                            <a:schemeClr val="tx1"/>
+                          </a:solidFill>
+                          <a:latin typeface="Arial" pitchFamily="34" charset="0"/>
+                          <a:ea typeface="Arial" pitchFamily="34" charset="-122"/>
+                          <a:cs typeface="Arial" pitchFamily="34" charset="-120"/>
+                        </a:rPr>
+                        <a:t>+0,236</a:t>
+                      </a:r>
+                      <a:endParaRPr lang="en-US" sz="1400" dirty="0">
+                        <a:latin typeface="Arial" charset="0"/>
+                        <a:ea typeface="Arial" charset="0"/>
+                        <a:cs typeface="Arial" charset="0"/>
+                      </a:endParaRPr>
+                    </a:p>
+                  </a:txBody>
+                  <a:tcPr marT="54864" marB="54864" anchor="ctr">
+                    <a:lnL w="9525" cap="flat" cmpd="sng" algn="ctr">
+                      <a:solidFill>
+                        <a:srgbClr val="BFC5CC"/>
+                      </a:solidFill>
+                      <a:prstDash val="solid"/>
+                      <a:round/>
+                      <a:headEnd type="none" w="med" len="med"/>
+                      <a:tailEnd type="none" w="med" len="med"/>
+                    </a:lnL>
+                    <a:lnR w="9525" cap="flat" cmpd="sng" algn="ctr">
+                      <a:solidFill>
+                        <a:srgbClr val="BFC5CC"/>
+                      </a:solidFill>
+                      <a:prstDash val="solid"/>
+                      <a:round/>
+                      <a:headEnd type="none" w="med" len="med"/>
+                      <a:tailEnd type="none" w="med" len="med"/>
+                    </a:lnR>
+                    <a:lnT w="9525" cap="flat" cmpd="sng" algn="ctr">
+                      <a:solidFill>
+                        <a:srgbClr val="BFC5CC"/>
+                      </a:solidFill>
+                      <a:prstDash val="solid"/>
+                      <a:round/>
+                      <a:headEnd type="none" w="med" len="med"/>
+                      <a:tailEnd type="none" w="med" len="med"/>
+                    </a:lnT>
+                    <a:lnB w="9525" cap="flat" cmpd="sng" algn="ctr">
+                      <a:solidFill>
+                        <a:srgbClr val="BFC5CC"/>
+                      </a:solidFill>
+                      <a:prstDash val="solid"/>
+                      <a:round/>
+                      <a:headEnd type="none" w="med" len="med"/>
+                      <a:tailEnd type="none" w="med" len="med"/>
+                    </a:lnB>
+                  </a:tcPr>
+                </a:tc>
+                <a:extLst>
+                  <a:ext uri="{0D108BD9-81ED-4DB2-BD59-A6C34878D82A}">
+                    <a16:rowId xmlns:a16="http://schemas.microsoft.com/office/drawing/2014/main" val="10005"/>
+                  </a:ext>
+                </a:extLst>
+              </a:tr>
+              <a:tr h="475488">
+                <a:tc>
+                  <a:txBody>
+                    <a:bodyPr/>
+                    <a:lstStyle/>
+                    <a:p>
+                      <a:pPr marL="0" indent="0">
+                        <a:buNone/>
+                      </a:pPr>
+                      <a:r>
+                        <a:rPr lang="en-US" sz="1400" b="1" dirty="0">
+                          <a:solidFill>
+                            <a:schemeClr val="tx1"/>
+                          </a:solidFill>
+                          <a:latin typeface="Arial" pitchFamily="34" charset="0"/>
+                          <a:ea typeface="Arial" pitchFamily="34" charset="-122"/>
+                          <a:cs typeface="Arial" pitchFamily="34" charset="-120"/>
+                        </a:rPr>
+                        <a:t>H3 Interaktion ohne Aufwand</a:t>
+                      </a:r>
+                      <a:endParaRPr lang="en-US" sz="1400" dirty="0">
+                        <a:latin typeface="Arial" charset="0"/>
+                        <a:ea typeface="Arial" charset="0"/>
+                        <a:cs typeface="Arial" charset="0"/>
+                      </a:endParaRPr>
+                    </a:p>
+                  </a:txBody>
+                  <a:tcPr marT="54864" marB="54864" anchor="ctr">
+                    <a:lnL w="9525" cap="flat" cmpd="sng" algn="ctr">
+                      <a:solidFill>
+                        <a:srgbClr val="BFC5CC"/>
+                      </a:solidFill>
+                      <a:prstDash val="solid"/>
+                      <a:round/>
+                      <a:headEnd type="none" w="med" len="med"/>
+                      <a:tailEnd type="none" w="med" len="med"/>
+                    </a:lnL>
+                    <a:lnR w="9525" cap="flat" cmpd="sng" algn="ctr">
+                      <a:solidFill>
+                        <a:srgbClr val="BFC5CC"/>
+                      </a:solidFill>
+                      <a:prstDash val="solid"/>
+                      <a:round/>
+                      <a:headEnd type="none" w="med" len="med"/>
+                      <a:tailEnd type="none" w="med" len="med"/>
+                    </a:lnR>
+                    <a:lnT w="9525" cap="flat" cmpd="sng" algn="ctr">
+                      <a:solidFill>
+                        <a:srgbClr val="BFC5CC"/>
+                      </a:solidFill>
+                      <a:prstDash val="solid"/>
+                      <a:round/>
+                      <a:headEnd type="none" w="med" len="med"/>
+                      <a:tailEnd type="none" w="med" len="med"/>
+                    </a:lnT>
+                    <a:lnB w="9525" cap="flat" cmpd="sng" algn="ctr">
+                      <a:solidFill>
+                        <a:srgbClr val="BFC5CC"/>
+                      </a:solidFill>
+                      <a:prstDash val="solid"/>
+                      <a:round/>
+                      <a:headEnd type="none" w="med" len="med"/>
+                      <a:tailEnd type="none" w="med" len="med"/>
+                    </a:lnB>
+                    <a:solidFill>
+                      <a:srgbClr val="F2F2F2"/>
+                    </a:solidFill>
+                  </a:tcPr>
+                </a:tc>
+                <a:tc>
+                  <a:txBody>
+                    <a:bodyPr/>
+                    <a:lstStyle/>
+                    <a:p>
+                      <a:pPr marL="0" indent="0">
+                        <a:buNone/>
+                      </a:pPr>
+                      <a:r>
+                        <a:rPr lang="en-US" sz="1400" dirty="0">
+                          <a:solidFill>
+                            <a:schemeClr val="tx1"/>
+                          </a:solidFill>
+                          <a:latin typeface="Arial" pitchFamily="34" charset="0"/>
+                          <a:ea typeface="Arial" pitchFamily="34" charset="-122"/>
+                          <a:cs typeface="Arial" pitchFamily="34" charset="-120"/>
+                        </a:rPr>
+                        <a:t>−0,714</a:t>
+                      </a:r>
+                      <a:endParaRPr lang="en-US" sz="1400" dirty="0">
+                        <a:latin typeface="Arial" charset="0"/>
+                        <a:ea typeface="Arial" charset="0"/>
+                        <a:cs typeface="Arial" charset="0"/>
+                      </a:endParaRPr>
+                    </a:p>
+                  </a:txBody>
+                  <a:tcPr marT="54864" marB="54864" anchor="ctr">
+                    <a:lnL w="9525" cap="flat" cmpd="sng" algn="ctr">
+                      <a:solidFill>
+                        <a:srgbClr val="BFC5CC"/>
+                      </a:solidFill>
+                      <a:prstDash val="solid"/>
+                      <a:round/>
+                      <a:headEnd type="none" w="med" len="med"/>
+                      <a:tailEnd type="none" w="med" len="med"/>
+                    </a:lnL>
+                    <a:lnR w="9525" cap="flat" cmpd="sng" algn="ctr">
+                      <a:solidFill>
+                        <a:srgbClr val="BFC5CC"/>
+                      </a:solidFill>
+                      <a:prstDash val="solid"/>
+                      <a:round/>
+                      <a:headEnd type="none" w="med" len="med"/>
+                      <a:tailEnd type="none" w="med" len="med"/>
+                    </a:lnR>
+                    <a:lnT w="9525" cap="flat" cmpd="sng" algn="ctr">
+                      <a:solidFill>
+                        <a:srgbClr val="BFC5CC"/>
+                      </a:solidFill>
+                      <a:prstDash val="solid"/>
+                      <a:round/>
+                      <a:headEnd type="none" w="med" len="med"/>
+                      <a:tailEnd type="none" w="med" len="med"/>
+                    </a:lnT>
+                    <a:lnB w="9525" cap="flat" cmpd="sng" algn="ctr">
+                      <a:solidFill>
+                        <a:srgbClr val="BFC5CC"/>
+                      </a:solidFill>
+                      <a:prstDash val="solid"/>
+                      <a:round/>
+                      <a:headEnd type="none" w="med" len="med"/>
+                      <a:tailEnd type="none" w="med" len="med"/>
+                    </a:lnB>
+                  </a:tcPr>
+                </a:tc>
+                <a:tc>
+                  <a:txBody>
+                    <a:bodyPr/>
+                    <a:lstStyle/>
+                    <a:p>
+                      <a:pPr marL="0" indent="0">
+                        <a:buNone/>
+                      </a:pPr>
+                      <a:r>
+                        <a:rPr lang="en-US" sz="1400" dirty="0">
+                          <a:solidFill>
+                            <a:schemeClr val="tx1"/>
+                          </a:solidFill>
+                          <a:latin typeface="Arial" pitchFamily="34" charset="0"/>
+                          <a:ea typeface="Arial" pitchFamily="34" charset="-122"/>
+                          <a:cs typeface="Arial" pitchFamily="34" charset="-120"/>
+                        </a:rPr>
+                        <a:t>−0,656</a:t>
+                      </a:r>
+                      <a:endParaRPr lang="en-US" sz="1400" dirty="0">
+                        <a:latin typeface="Arial" charset="0"/>
+                        <a:ea typeface="Arial" charset="0"/>
+                        <a:cs typeface="Arial" charset="0"/>
+                      </a:endParaRPr>
+                    </a:p>
+                  </a:txBody>
+                  <a:tcPr marT="54864" marB="54864" anchor="ctr">
+                    <a:lnL w="9525" cap="flat" cmpd="sng" algn="ctr">
+                      <a:solidFill>
+                        <a:srgbClr val="BFC5CC"/>
+                      </a:solidFill>
+                      <a:prstDash val="solid"/>
+                      <a:round/>
+                      <a:headEnd type="none" w="med" len="med"/>
+                      <a:tailEnd type="none" w="med" len="med"/>
+                    </a:lnL>
+                    <a:lnR w="9525" cap="flat" cmpd="sng" algn="ctr">
+                      <a:solidFill>
+                        <a:srgbClr val="BFC5CC"/>
+                      </a:solidFill>
+                      <a:prstDash val="solid"/>
+                      <a:round/>
+                      <a:headEnd type="none" w="med" len="med"/>
+                      <a:tailEnd type="none" w="med" len="med"/>
+                    </a:lnR>
+                    <a:lnT w="9525" cap="flat" cmpd="sng" algn="ctr">
+                      <a:solidFill>
+                        <a:srgbClr val="BFC5CC"/>
+                      </a:solidFill>
+                      <a:prstDash val="solid"/>
+                      <a:round/>
+                      <a:headEnd type="none" w="med" len="med"/>
+                      <a:tailEnd type="none" w="med" len="med"/>
+                    </a:lnT>
+                    <a:lnB w="9525" cap="flat" cmpd="sng" algn="ctr">
+                      <a:solidFill>
+                        <a:srgbClr val="BFC5CC"/>
+                      </a:solidFill>
+                      <a:prstDash val="solid"/>
+                      <a:round/>
+                      <a:headEnd type="none" w="med" len="med"/>
+                      <a:tailEnd type="none" w="med" len="med"/>
+                    </a:lnB>
+                  </a:tcPr>
+                </a:tc>
+                <a:tc>
+                  <a:txBody>
+                    <a:bodyPr/>
+                    <a:lstStyle/>
+                    <a:p>
+                      <a:pPr marL="0" indent="0">
+                        <a:buNone/>
+                      </a:pPr>
+                      <a:r>
+                        <a:rPr lang="en-US" sz="1400" dirty="0">
+                          <a:solidFill>
+                            <a:schemeClr val="tx1"/>
+                          </a:solidFill>
+                          <a:latin typeface="Arial" pitchFamily="34" charset="0"/>
+                          <a:ea typeface="Arial" pitchFamily="34" charset="-122"/>
+                          <a:cs typeface="Arial" pitchFamily="34" charset="-120"/>
+                        </a:rPr>
+                        <a:t>−0,710</a:t>
+                      </a:r>
+                      <a:endParaRPr lang="en-US" sz="1400" dirty="0">
+                        <a:latin typeface="Arial" charset="0"/>
+                        <a:ea typeface="Arial" charset="0"/>
+                        <a:cs typeface="Arial" charset="0"/>
+                      </a:endParaRPr>
+                    </a:p>
+                  </a:txBody>
+                  <a:tcPr marT="54864" marB="54864" anchor="ctr">
+                    <a:lnL w="9525" cap="flat" cmpd="sng" algn="ctr">
+                      <a:solidFill>
+                        <a:srgbClr val="BFC5CC"/>
+                      </a:solidFill>
+                      <a:prstDash val="solid"/>
+                      <a:round/>
+                      <a:headEnd type="none" w="med" len="med"/>
+                      <a:tailEnd type="none" w="med" len="med"/>
+                    </a:lnL>
+                    <a:lnR w="9525" cap="flat" cmpd="sng" algn="ctr">
+                      <a:solidFill>
+                        <a:srgbClr val="BFC5CC"/>
+                      </a:solidFill>
+                      <a:prstDash val="solid"/>
+                      <a:round/>
+                      <a:headEnd type="none" w="med" len="med"/>
+                      <a:tailEnd type="none" w="med" len="med"/>
+                    </a:lnR>
+                    <a:lnT w="9525" cap="flat" cmpd="sng" algn="ctr">
+                      <a:solidFill>
+                        <a:srgbClr val="BFC5CC"/>
+                      </a:solidFill>
+                      <a:prstDash val="solid"/>
+                      <a:round/>
+                      <a:headEnd type="none" w="med" len="med"/>
+                      <a:tailEnd type="none" w="med" len="med"/>
+                    </a:lnT>
+                    <a:lnB w="9525" cap="flat" cmpd="sng" algn="ctr">
+                      <a:solidFill>
+                        <a:srgbClr val="BFC5CC"/>
+                      </a:solidFill>
+                      <a:prstDash val="solid"/>
+                      <a:round/>
+                      <a:headEnd type="none" w="med" len="med"/>
+                      <a:tailEnd type="none" w="med" len="med"/>
+                    </a:lnB>
+                  </a:tcPr>
+                </a:tc>
+                <a:extLst>
+                  <a:ext uri="{0D108BD9-81ED-4DB2-BD59-A6C34878D82A}">
+                    <a16:rowId xmlns:a16="http://schemas.microsoft.com/office/drawing/2014/main" val="10005"/>
+                  </a:ext>
+                </a:extLst>
+              </a:tr>
+              <a:tr h="475488">
+                <a:tc>
+                  <a:txBody>
+                    <a:bodyPr/>
+                    <a:lstStyle/>
+                    <a:p>
+                      <a:pPr marL="0" indent="0">
+                        <a:buNone/>
+                      </a:pPr>
+                      <a:r>
+                        <a:rPr lang="en-US" sz="1400" b="1" dirty="0">
+                          <a:solidFill>
+                            <a:schemeClr val="tx1"/>
+                          </a:solidFill>
+                          <a:latin typeface="Arial" pitchFamily="34" charset="0"/>
+                          <a:ea typeface="Arial" pitchFamily="34" charset="-122"/>
+                          <a:cs typeface="Arial" pitchFamily="34" charset="-120"/>
+                        </a:rPr>
+                        <a:t>Siedlung in Modell 2</a:t>
+                      </a:r>
+                      <a:endParaRPr lang="en-US" sz="1400" dirty="0">
+                        <a:latin typeface="Arial" charset="0"/>
+                        <a:ea typeface="Arial" charset="0"/>
+                        <a:cs typeface="Arial" charset="0"/>
+                      </a:endParaRPr>
+                    </a:p>
+                  </a:txBody>
+                  <a:tcPr marT="54864" marB="54864" anchor="ctr">
+                    <a:lnL w="9525" cap="flat" cmpd="sng" algn="ctr">
+                      <a:solidFill>
+                        <a:srgbClr val="BFC5CC"/>
+                      </a:solidFill>
+                      <a:prstDash val="solid"/>
+                      <a:round/>
+                      <a:headEnd type="none" w="med" len="med"/>
+                      <a:tailEnd type="none" w="med" len="med"/>
+                    </a:lnL>
+                    <a:lnR w="9525" cap="flat" cmpd="sng" algn="ctr">
+                      <a:solidFill>
+                        <a:srgbClr val="BFC5CC"/>
+                      </a:solidFill>
+                      <a:prstDash val="solid"/>
+                      <a:round/>
+                      <a:headEnd type="none" w="med" len="med"/>
+                      <a:tailEnd type="none" w="med" len="med"/>
+                    </a:lnR>
+                    <a:lnT w="9525" cap="flat" cmpd="sng" algn="ctr">
+                      <a:solidFill>
+                        <a:srgbClr val="BFC5CC"/>
+                      </a:solidFill>
+                      <a:prstDash val="solid"/>
+                      <a:round/>
+                      <a:headEnd type="none" w="med" len="med"/>
+                      <a:tailEnd type="none" w="med" len="med"/>
+                    </a:lnT>
+                    <a:lnB w="9525" cap="flat" cmpd="sng" algn="ctr">
+                      <a:solidFill>
+                        <a:srgbClr val="BFC5CC"/>
+                      </a:solidFill>
+                      <a:prstDash val="solid"/>
+                      <a:round/>
+                      <a:headEnd type="none" w="med" len="med"/>
+                      <a:tailEnd type="none" w="med" len="med"/>
+                    </a:lnB>
+                    <a:solidFill>
+                      <a:srgbClr val="F2F2F2"/>
+                    </a:solidFill>
+                  </a:tcPr>
+                </a:tc>
+                <a:tc>
+                  <a:txBody>
+                    <a:bodyPr/>
+                    <a:lstStyle/>
+                    <a:p>
+                      <a:pPr marL="0" indent="0">
+                        <a:buNone/>
+                      </a:pPr>
+                      <a:r>
+                        <a:rPr lang="en-US" sz="1400" dirty="0">
+                          <a:solidFill>
+                            <a:schemeClr val="tx1"/>
+                          </a:solidFill>
+                          <a:latin typeface="Arial" pitchFamily="34" charset="0"/>
+                          <a:ea typeface="Arial" pitchFamily="34" charset="-122"/>
+                          <a:cs typeface="Arial" pitchFamily="34" charset="-120"/>
+                        </a:rPr>
+                        <a:t>−0,059 (n. s.)</a:t>
+                      </a:r>
+                      <a:endParaRPr lang="en-US" sz="1400" dirty="0">
+                        <a:latin typeface="Arial" charset="0"/>
+                        <a:ea typeface="Arial" charset="0"/>
+                        <a:cs typeface="Arial" charset="0"/>
+                      </a:endParaRPr>
+                    </a:p>
+                  </a:txBody>
+                  <a:tcPr marT="54864" marB="54864" anchor="ctr">
+                    <a:lnL w="9525" cap="flat" cmpd="sng" algn="ctr">
+                      <a:solidFill>
+                        <a:srgbClr val="BFC5CC"/>
+                      </a:solidFill>
+                      <a:prstDash val="solid"/>
+                      <a:round/>
+                      <a:headEnd type="none" w="med" len="med"/>
+                      <a:tailEnd type="none" w="med" len="med"/>
+                    </a:lnL>
+                    <a:lnR w="9525" cap="flat" cmpd="sng" algn="ctr">
+                      <a:solidFill>
+                        <a:srgbClr val="BFC5CC"/>
+                      </a:solidFill>
+                      <a:prstDash val="solid"/>
+                      <a:round/>
+                      <a:headEnd type="none" w="med" len="med"/>
+                      <a:tailEnd type="none" w="med" len="med"/>
+                    </a:lnR>
+                    <a:lnT w="9525" cap="flat" cmpd="sng" algn="ctr">
+                      <a:solidFill>
+                        <a:srgbClr val="BFC5CC"/>
+                      </a:solidFill>
+                      <a:prstDash val="solid"/>
+                      <a:round/>
+                      <a:headEnd type="none" w="med" len="med"/>
+                      <a:tailEnd type="none" w="med" len="med"/>
+                    </a:lnT>
+                    <a:lnB w="9525" cap="flat" cmpd="sng" algn="ctr">
+                      <a:solidFill>
+                        <a:srgbClr val="BFC5CC"/>
+                      </a:solidFill>
+                      <a:prstDash val="solid"/>
+                      <a:round/>
+                      <a:headEnd type="none" w="med" len="med"/>
+                      <a:tailEnd type="none" w="med" len="med"/>
+                    </a:lnB>
+                  </a:tcPr>
+                </a:tc>
+                <a:tc>
+                  <a:txBody>
+                    <a:bodyPr/>
+                    <a:lstStyle/>
+                    <a:p>
+                      <a:pPr marL="0" indent="0">
+                        <a:buNone/>
+                      </a:pPr>
+                      <a:r>
+                        <a:rPr lang="en-US" sz="1400" dirty="0">
+                          <a:solidFill>
+                            <a:schemeClr val="tx1"/>
+                          </a:solidFill>
+                          <a:latin typeface="Arial" pitchFamily="34" charset="0"/>
+                          <a:ea typeface="Arial" pitchFamily="34" charset="-122"/>
+                          <a:cs typeface="Arial" pitchFamily="34" charset="-120"/>
+                        </a:rPr>
+                        <a:t>−0,044 (n. s.)</a:t>
+                      </a:r>
+                      <a:endParaRPr lang="en-US" sz="1400" dirty="0">
+                        <a:latin typeface="Arial" charset="0"/>
+                        <a:ea typeface="Arial" charset="0"/>
+                        <a:cs typeface="Arial" charset="0"/>
+                      </a:endParaRPr>
+                    </a:p>
+                  </a:txBody>
+                  <a:tcPr marT="54864" marB="54864" anchor="ctr">
+                    <a:lnL w="9525" cap="flat" cmpd="sng" algn="ctr">
+                      <a:solidFill>
+                        <a:srgbClr val="BFC5CC"/>
+                      </a:solidFill>
+                      <a:prstDash val="solid"/>
+                      <a:round/>
+                      <a:headEnd type="none" w="med" len="med"/>
+                      <a:tailEnd type="none" w="med" len="med"/>
+                    </a:lnL>
+                    <a:lnR w="9525" cap="flat" cmpd="sng" algn="ctr">
+                      <a:solidFill>
+                        <a:srgbClr val="BFC5CC"/>
+                      </a:solidFill>
+                      <a:prstDash val="solid"/>
+                      <a:round/>
+                      <a:headEnd type="none" w="med" len="med"/>
+                      <a:tailEnd type="none" w="med" len="med"/>
+                    </a:lnR>
+                    <a:lnT w="9525" cap="flat" cmpd="sng" algn="ctr">
+                      <a:solidFill>
+                        <a:srgbClr val="BFC5CC"/>
+                      </a:solidFill>
+                      <a:prstDash val="solid"/>
+                      <a:round/>
+                      <a:headEnd type="none" w="med" len="med"/>
+                      <a:tailEnd type="none" w="med" len="med"/>
+                    </a:lnT>
+                    <a:lnB w="9525" cap="flat" cmpd="sng" algn="ctr">
+                      <a:solidFill>
+                        <a:srgbClr val="BFC5CC"/>
+                      </a:solidFill>
+                      <a:prstDash val="solid"/>
+                      <a:round/>
+                      <a:headEnd type="none" w="med" len="med"/>
+                      <a:tailEnd type="none" w="med" len="med"/>
+                    </a:lnB>
+                  </a:tcPr>
+                </a:tc>
+                <a:tc>
+                  <a:txBody>
+                    <a:bodyPr/>
+                    <a:lstStyle/>
+                    <a:p>
+                      <a:pPr marL="0" indent="0">
+                        <a:buNone/>
+                      </a:pPr>
+                      <a:r>
+                        <a:rPr lang="en-US" sz="1400" dirty="0">
+                          <a:solidFill>
+                            <a:schemeClr val="tx1"/>
+                          </a:solidFill>
+                          <a:latin typeface="Arial" pitchFamily="34" charset="0"/>
+                          <a:ea typeface="Arial" pitchFamily="34" charset="-122"/>
+                          <a:cs typeface="Arial" pitchFamily="34" charset="-120"/>
+                        </a:rPr>
+                        <a:t>−0,058 (n. s.)</a:t>
+                      </a:r>
+                      <a:endParaRPr lang="en-US" sz="1400" dirty="0">
+                        <a:latin typeface="Arial" charset="0"/>
+                        <a:ea typeface="Arial" charset="0"/>
+                        <a:cs typeface="Arial" charset="0"/>
+                      </a:endParaRPr>
+                    </a:p>
+                  </a:txBody>
+                  <a:tcPr marT="54864" marB="54864" anchor="ctr">
+                    <a:lnL w="9525" cap="flat" cmpd="sng" algn="ctr">
+                      <a:solidFill>
+                        <a:srgbClr val="BFC5CC"/>
+                      </a:solidFill>
+                      <a:prstDash val="solid"/>
+                      <a:round/>
+                      <a:headEnd type="none" w="med" len="med"/>
+                      <a:tailEnd type="none" w="med" len="med"/>
+                    </a:lnL>
+                    <a:lnR w="9525" cap="flat" cmpd="sng" algn="ctr">
+                      <a:solidFill>
+                        <a:srgbClr val="BFC5CC"/>
+                      </a:solidFill>
+                      <a:prstDash val="solid"/>
+                      <a:round/>
+                      <a:headEnd type="none" w="med" len="med"/>
+                      <a:tailEnd type="none" w="med" len="med"/>
+                    </a:lnR>
+                    <a:lnT w="9525" cap="flat" cmpd="sng" algn="ctr">
+                      <a:solidFill>
+                        <a:srgbClr val="BFC5CC"/>
+                      </a:solidFill>
+                      <a:prstDash val="solid"/>
+                      <a:round/>
+                      <a:headEnd type="none" w="med" len="med"/>
+                      <a:tailEnd type="none" w="med" len="med"/>
+                    </a:lnT>
+                    <a:lnB w="9525" cap="flat" cmpd="sng" algn="ctr">
+                      <a:solidFill>
+                        <a:srgbClr val="BFC5CC"/>
+                      </a:solidFill>
+                      <a:prstDash val="solid"/>
+                      <a:round/>
+                      <a:headEnd type="none" w="med" len="med"/>
+                      <a:tailEnd type="none" w="med" len="med"/>
+                    </a:lnB>
+                  </a:tcPr>
+                </a:tc>
+                <a:extLst>
+                  <a:ext uri="{0D108BD9-81ED-4DB2-BD59-A6C34878D82A}">
+                    <a16:rowId xmlns:a16="http://schemas.microsoft.com/office/drawing/2014/main" val="10006"/>
+                  </a:ext>
+                </a:extLst>
+              </a:tr>
+              <a:tr h="475488">
+                <a:tc>
+                  <a:txBody>
+                    <a:bodyPr/>
+                    <a:lstStyle/>
+                    <a:p>
+                      <a:pPr marL="0" indent="0">
+                        <a:buNone/>
+                      </a:pPr>
+                      <a:r>
+                        <a:rPr lang="en-US" sz="1400" b="1" dirty="0">
+                          <a:solidFill>
+                            <a:schemeClr val="tx1"/>
+                          </a:solidFill>
+                          <a:latin typeface="Arial" pitchFamily="34" charset="0"/>
+                          <a:ea typeface="Arial" pitchFamily="34" charset="-122"/>
+                          <a:cs typeface="Arial" pitchFamily="34" charset="-120"/>
+                        </a:rPr>
+                        <a:t>Moran's I der Residuen</a:t>
+                      </a:r>
+                      <a:endParaRPr lang="en-US" sz="1400" dirty="0">
+                        <a:latin typeface="Arial" charset="0"/>
+                        <a:ea typeface="Arial" charset="0"/>
+                        <a:cs typeface="Arial" charset="0"/>
+                      </a:endParaRPr>
+                    </a:p>
+                  </a:txBody>
+                  <a:tcPr marT="54864" marB="54864" anchor="ctr">
+                    <a:lnL w="9525" cap="flat" cmpd="sng" algn="ctr">
+                      <a:solidFill>
+                        <a:srgbClr val="BFC5CC"/>
+                      </a:solidFill>
+                      <a:prstDash val="solid"/>
+                      <a:round/>
+                      <a:headEnd type="none" w="med" len="med"/>
+                      <a:tailEnd type="none" w="med" len="med"/>
+                    </a:lnL>
+                    <a:lnR w="9525" cap="flat" cmpd="sng" algn="ctr">
+                      <a:solidFill>
+                        <a:srgbClr val="BFC5CC"/>
+                      </a:solidFill>
+                      <a:prstDash val="solid"/>
+                      <a:round/>
+                      <a:headEnd type="none" w="med" len="med"/>
+                      <a:tailEnd type="none" w="med" len="med"/>
+                    </a:lnR>
+                    <a:lnT w="9525" cap="flat" cmpd="sng" algn="ctr">
+                      <a:solidFill>
+                        <a:srgbClr val="BFC5CC"/>
+                      </a:solidFill>
+                      <a:prstDash val="solid"/>
+                      <a:round/>
+                      <a:headEnd type="none" w="med" len="med"/>
+                      <a:tailEnd type="none" w="med" len="med"/>
+                    </a:lnT>
+                    <a:lnB w="9525" cap="flat" cmpd="sng" algn="ctr">
+                      <a:solidFill>
+                        <a:srgbClr val="BFC5CC"/>
+                      </a:solidFill>
+                      <a:prstDash val="solid"/>
+                      <a:round/>
+                      <a:headEnd type="none" w="med" len="med"/>
+                      <a:tailEnd type="none" w="med" len="med"/>
+                    </a:lnB>
+                    <a:solidFill>
+                      <a:srgbClr val="F2F2F2"/>
+                    </a:solidFill>
+                  </a:tcPr>
+                </a:tc>
+                <a:tc>
+                  <a:txBody>
+                    <a:bodyPr/>
+                    <a:lstStyle/>
+                    <a:p>
+                      <a:pPr marL="0" indent="0">
+                        <a:buNone/>
+                      </a:pPr>
+                      <a:r>
+                        <a:rPr lang="en-US" sz="1400" dirty="0">
+                          <a:solidFill>
+                            <a:schemeClr val="tx1"/>
+                          </a:solidFill>
+                          <a:latin typeface="Arial" pitchFamily="34" charset="0"/>
+                          <a:ea typeface="Arial" pitchFamily="34" charset="-122"/>
+                          <a:cs typeface="Arial" pitchFamily="34" charset="-120"/>
+                        </a:rPr>
+                        <a:t>0,113</a:t>
+                      </a:r>
+                      <a:endParaRPr lang="en-US" sz="1400" dirty="0">
+                        <a:latin typeface="Arial" charset="0"/>
+                        <a:ea typeface="Arial" charset="0"/>
+                        <a:cs typeface="Arial" charset="0"/>
+                      </a:endParaRPr>
+                    </a:p>
+                  </a:txBody>
+                  <a:tcPr marT="54864" marB="54864" anchor="ctr">
+                    <a:lnL w="9525" cap="flat" cmpd="sng" algn="ctr">
+                      <a:solidFill>
+                        <a:srgbClr val="BFC5CC"/>
+                      </a:solidFill>
+                      <a:prstDash val="solid"/>
+                      <a:round/>
+                      <a:headEnd type="none" w="med" len="med"/>
+                      <a:tailEnd type="none" w="med" len="med"/>
+                    </a:lnL>
+                    <a:lnR w="9525" cap="flat" cmpd="sng" algn="ctr">
+                      <a:solidFill>
+                        <a:srgbClr val="BFC5CC"/>
+                      </a:solidFill>
+                      <a:prstDash val="solid"/>
+                      <a:round/>
+                      <a:headEnd type="none" w="med" len="med"/>
+                      <a:tailEnd type="none" w="med" len="med"/>
+                    </a:lnR>
+                    <a:lnT w="9525" cap="flat" cmpd="sng" algn="ctr">
+                      <a:solidFill>
+                        <a:srgbClr val="BFC5CC"/>
+                      </a:solidFill>
+                      <a:prstDash val="solid"/>
+                      <a:round/>
+                      <a:headEnd type="none" w="med" len="med"/>
+                      <a:tailEnd type="none" w="med" len="med"/>
+                    </a:lnT>
+                    <a:lnB w="9525" cap="flat" cmpd="sng" algn="ctr">
+                      <a:solidFill>
+                        <a:srgbClr val="BFC5CC"/>
+                      </a:solidFill>
+                      <a:prstDash val="solid"/>
+                      <a:round/>
+                      <a:headEnd type="none" w="med" len="med"/>
+                      <a:tailEnd type="none" w="med" len="med"/>
+                    </a:lnB>
+                  </a:tcPr>
+                </a:tc>
+                <a:tc>
+                  <a:txBody>
+                    <a:bodyPr/>
+                    <a:lstStyle/>
+                    <a:p>
+                      <a:pPr marL="0" indent="0">
+                        <a:buNone/>
+                      </a:pPr>
+                      <a:r>
+                        <a:rPr lang="en-US" sz="1400" dirty="0">
+                          <a:solidFill>
+                            <a:schemeClr val="tx1"/>
+                          </a:solidFill>
+                          <a:latin typeface="Arial" pitchFamily="34" charset="0"/>
+                          <a:ea typeface="Arial" pitchFamily="34" charset="-122"/>
+                          <a:cs typeface="Arial" pitchFamily="34" charset="-120"/>
+                        </a:rPr>
+                        <a:t>0,160</a:t>
+                      </a:r>
+                      <a:endParaRPr lang="en-US" sz="1400" dirty="0">
+                        <a:latin typeface="Arial" charset="0"/>
+                        <a:ea typeface="Arial" charset="0"/>
+                        <a:cs typeface="Arial" charset="0"/>
+                      </a:endParaRPr>
+                    </a:p>
+                  </a:txBody>
+                  <a:tcPr marT="54864" marB="54864" anchor="ctr">
+                    <a:lnL w="9525" cap="flat" cmpd="sng" algn="ctr">
+                      <a:solidFill>
+                        <a:srgbClr val="BFC5CC"/>
+                      </a:solidFill>
+                      <a:prstDash val="solid"/>
+                      <a:round/>
+                      <a:headEnd type="none" w="med" len="med"/>
+                      <a:tailEnd type="none" w="med" len="med"/>
+                    </a:lnL>
+                    <a:lnR w="9525" cap="flat" cmpd="sng" algn="ctr">
+                      <a:solidFill>
+                        <a:srgbClr val="BFC5CC"/>
+                      </a:solidFill>
+                      <a:prstDash val="solid"/>
+                      <a:round/>
+                      <a:headEnd type="none" w="med" len="med"/>
+                      <a:tailEnd type="none" w="med" len="med"/>
+                    </a:lnR>
+                    <a:lnT w="9525" cap="flat" cmpd="sng" algn="ctr">
+                      <a:solidFill>
+                        <a:srgbClr val="BFC5CC"/>
+                      </a:solidFill>
+                      <a:prstDash val="solid"/>
+                      <a:round/>
+                      <a:headEnd type="none" w="med" len="med"/>
+                      <a:tailEnd type="none" w="med" len="med"/>
+                    </a:lnT>
+                    <a:lnB w="9525" cap="flat" cmpd="sng" algn="ctr">
+                      <a:solidFill>
+                        <a:srgbClr val="BFC5CC"/>
+                      </a:solidFill>
+                      <a:prstDash val="solid"/>
+                      <a:round/>
+                      <a:headEnd type="none" w="med" len="med"/>
+                      <a:tailEnd type="none" w="med" len="med"/>
+                    </a:lnB>
+                  </a:tcPr>
+                </a:tc>
+                <a:tc>
+                  <a:txBody>
+                    <a:bodyPr/>
+                    <a:lstStyle/>
+                    <a:p>
+                      <a:pPr marL="0" indent="0">
+                        <a:buNone/>
+                      </a:pPr>
+                      <a:r>
+                        <a:rPr lang="en-US" sz="1400" dirty="0">
+                          <a:solidFill>
+                            <a:schemeClr val="tx1"/>
+                          </a:solidFill>
+                          <a:latin typeface="Arial" pitchFamily="34" charset="0"/>
+                          <a:ea typeface="Arial" pitchFamily="34" charset="-122"/>
+                          <a:cs typeface="Arial" pitchFamily="34" charset="-120"/>
+                        </a:rPr>
+                        <a:t>0,113</a:t>
+                      </a:r>
+                      <a:endParaRPr lang="en-US" sz="1400" dirty="0">
+                        <a:latin typeface="Arial" charset="0"/>
+                        <a:ea typeface="Arial" charset="0"/>
+                        <a:cs typeface="Arial" charset="0"/>
+                      </a:endParaRPr>
+                    </a:p>
+                  </a:txBody>
+                  <a:tcPr marT="54864" marB="54864" anchor="ctr">
+                    <a:lnL w="9525" cap="flat" cmpd="sng" algn="ctr">
+                      <a:solidFill>
+                        <a:srgbClr val="BFC5CC"/>
+                      </a:solidFill>
+                      <a:prstDash val="solid"/>
+                      <a:round/>
+                      <a:headEnd type="none" w="med" len="med"/>
+                      <a:tailEnd type="none" w="med" len="med"/>
+                    </a:lnL>
+                    <a:lnR w="9525" cap="flat" cmpd="sng" algn="ctr">
+                      <a:solidFill>
+                        <a:srgbClr val="BFC5CC"/>
+                      </a:solidFill>
+                      <a:prstDash val="solid"/>
+                      <a:round/>
+                      <a:headEnd type="none" w="med" len="med"/>
+                      <a:tailEnd type="none" w="med" len="med"/>
+                    </a:lnR>
+                    <a:lnT w="9525" cap="flat" cmpd="sng" algn="ctr">
+                      <a:solidFill>
+                        <a:srgbClr val="BFC5CC"/>
+                      </a:solidFill>
+                      <a:prstDash val="solid"/>
+                      <a:round/>
+                      <a:headEnd type="none" w="med" len="med"/>
+                      <a:tailEnd type="none" w="med" len="med"/>
+                    </a:lnT>
+                    <a:lnB w="9525" cap="flat" cmpd="sng" algn="ctr">
+                      <a:solidFill>
+                        <a:srgbClr val="BFC5CC"/>
+                      </a:solidFill>
+                      <a:prstDash val="solid"/>
+                      <a:round/>
+                      <a:headEnd type="none" w="med" len="med"/>
+                      <a:tailEnd type="none" w="med" len="med"/>
+                    </a:lnB>
+                  </a:tcPr>
+                </a:tc>
+                <a:extLst>
+                  <a:ext uri="{0D108BD9-81ED-4DB2-BD59-A6C34878D82A}">
+                    <a16:rowId xmlns:a16="http://schemas.microsoft.com/office/drawing/2014/main" val="10007"/>
+                  </a:ext>
+                </a:extLst>
+              </a:tr>
+            </a:tbl>
+          </a:graphicData>
+        </a:graphic>
+      </p:graphicFrame>
+      <p:sp>
+        <p:nvSpPr>
+          <p:cNvPr id="25" name="Slide Number Placeholder 0"/>
+          <p:cNvSpPr>
+            <a:spLocks noGrp="1"/>
+          </p:cNvSpPr>
+          <p:nvPr>
+            <p:ph type="sldNum" sz="quarter" idx="4294967295"/>
+          </p:nvPr>
+        </p:nvSpPr>
+        <p:spPr>
+          <a:xfrm>
+            <a:off x="11155680" y="6400800"/>
+            <a:ext cx="484632" cy="274320"/>
+          </a:xfrm>
+          <a:prstGeom prst="rect">
+            <a:avLst/>
+          </a:prstGeom>
+          <a:extLst>
+            <a:ext uri="{C572A759-6A51-4108-AA02-DFA0A04FC94B}">
+              <ma14:wrappingTextBoxFlag xmlns="" xmlns:ma14="http://schemas.microsoft.com/office/mac/drawingml/2011/main" val="0"/>
+            </a:ext>
+          </a:extLst>
+        </p:spPr>
+        <p:txBody>
+          <a:bodyPr/>
+          <a:lstStyle>
+            <a:lvl1pPr>
+              <a:defRPr sz="1000">
+                <a:solidFill>
+                  <a:schemeClr val="accent4"/>
+                </a:solidFill>
+              </a:defRPr>
+            </a:lvl1pPr>
+          </a:lstStyle>
+          <a:p>
+            <a:pPr algn="r"/>
+            <a:fld id="{F7021451-1387-4CA6-816F-3879F97B5CBC}" type="slidenum">
+              <a:rPr lang="en-US" b="0"/>
+              <a:t>13</a:t>
+            </a:fld>
+            <a:endParaRPr lang="en-US"/>
+          </a:p>
+        </p:txBody>
+      </p:sp>
+    </p:spTree>
+  </p:cSld>
+  <p:clrMapOvr>
+    <a:masterClrMapping/>
+  </p:clrMapOvr>
+</p:sld>
+</file>
+
+<file path=ppt/slides/slide14.xml><?xml version="1.0" encoding="utf-8"?>
+<p:sld xmlns:a="http://schemas.openxmlformats.org/drawingml/2006/main" xmlns:r="http://schemas.openxmlformats.org/officeDocument/2006/relationships" xmlns:p="http://schemas.openxmlformats.org/presentationml/2006/main">
+  <p:cSld name="Slide 13">
+    <p:spTree>
+      <p:nvGrpSpPr>
+        <p:cNvPr id="1" name=""/>
+        <p:cNvGrpSpPr/>
+        <p:nvPr/>
+      </p:nvGrpSpPr>
+      <p:grpSpPr>
+        <a:xfrm>
+          <a:off x="0" y="0"/>
+          <a:ext cx="0" cy="0"/>
+          <a:chOff x="0" y="0"/>
+          <a:chExt cx="0" cy="0"/>
+        </a:xfrm>
+      </p:grpSpPr>
+      <p:sp>
+        <p:nvSpPr>
+          <p:cNvPr id="2" name="Text 1"/>
+          <p:cNvSpPr>
+            <a:spLocks noGrp="1"/>
+          </p:cNvSpPr>
+          <p:nvPr>
+            <p:ph type="title" idx="101" hasCustomPrompt="1"/>
+          </p:nvPr>
+        </p:nvSpPr>
+        <p:spPr>
+          <a:xfrm>
+            <a:off x="548640" y="530352"/>
+            <a:ext cx="11091672" cy="731520"/>
+          </a:xfrm>
+          <a:prstGeom prst="rect">
+            <a:avLst/>
+          </a:prstGeom>
+          <a:noFill/>
+          <a:ln/>
+        </p:spPr>
+        <p:txBody>
+          <a:bodyPr wrap="square" lIns="0" tIns="0" rIns="0" bIns="0" rtlCol="0" anchor="ctr"/>
+          <a:lstStyle/>
+          <a:p>
+            <a:pPr marL="0" indent="0" algn="l">
+              <a:buNone/>
+            </a:pPr>
+            <a:r>
+              <a:rPr lang="en-US" sz="3000" b="1" dirty="0">
+                <a:solidFill>
+                  <a:schemeClr val="bg1"/>
+                </a:solidFill>
+              </a:rPr>
+              <a:t>Wo die Lösung an Grenzen käme</a:t>
+            </a:r>
+            <a:endParaRPr lang="en-US" sz="3000" dirty="0"/>
+          </a:p>
+        </p:txBody>
+      </p:sp>
+      <p:sp>
+        <p:nvSpPr>
+          <p:cNvPr id="3" name="Teil"/>
+          <p:cNvSpPr txBox="1"/>
+          <p:nvPr/>
+        </p:nvSpPr>
+        <p:spPr>
+          <a:xfrm>
+            <a:off x="548640" y="201168"/>
+            <a:ext cx="7315200" cy="274320"/>
+          </a:xfrm>
+          <a:prstGeom prst="rect">
+            <a:avLst/>
+          </a:prstGeom>
+          <a:noFill/>
+          <a:ln/>
+        </p:spPr>
+        <p:txBody>
+          <a:bodyPr wrap="square" lIns="0" tIns="0" rIns="0" bIns="0" rtlCol="0" anchor="ctr"/>
+          <a:lstStyle/>
+          <a:p>
+            <a:pPr marL="0" indent="0">
+              <a:buNone/>
+            </a:pPr>
+            <a:r>
+              <a:rPr lang="en-US" sz="1200" dirty="0">
+                <a:solidFill>
+                  <a:srgbClr val="9CC7E8"/>
+                </a:solidFill>
+              </a:rPr>
+              <a:t>Reserve · Skalierbarkeit</a:t>
+            </a:r>
+            <a:endParaRPr lang="en-US" sz="1200" dirty="0"/>
+          </a:p>
+        </p:txBody>
+      </p:sp>
+      <p:graphicFrame>
+        <p:nvGraphicFramePr>
+          <p:cNvPr id="14" name="Table 0"/>
+          <p:cNvGraphicFramePr>
+            <a:graphicFrameLocks noGrp="1"/>
+          </p:cNvGraphicFramePr>
+          <p:nvPr>
+            <p:extLst>
+              <p:ext uri="{D42A27DB-BD31-4B8C-83A1-F6EECF244321}">
+                <p14:modId xmlns:p14="http://schemas.microsoft.com/office/powerpoint/2010/main" val="1579011935"/>
+              </p:ext>
+            </p:extLst>
+          </p:nvPr>
+        </p:nvGraphicFramePr>
+        <p:xfrm>
+          <a:off x="548640" y="1600200"/>
+          <a:ext cx="11091672" cy="3273552"/>
         </p:xfrm>
         <a:graphic>
           <a:graphicData uri="http://schemas.openxmlformats.org/drawingml/2006/table">
@@ -6193,6 +8887,17 @@
                       <a:pPr marL="0" indent="0">
                         <a:buNone/>
                       </a:pPr>
+                      <a:r>
+                        <a:rPr lang="en-US" sz="1400" b="1" dirty="0">
+                          <a:solidFill>
+                            <a:schemeClr val="bg1"/>
+                          </a:solidFill>
+                          <a:latin typeface="Arial" pitchFamily="34" charset="0"/>
+                          <a:ea typeface="Arial" pitchFamily="34" charset="-122"/>
+                          <a:cs typeface="Arial" pitchFamily="34" charset="-120"/>
+                        </a:rPr>
+                        <a:t>Phase</a:t>
+                      </a:r>
                       <a:endParaRPr lang="en-US" sz="1400" dirty="0">
                         <a:latin typeface="Arial" charset="0"/>
                         <a:ea typeface="Arial" charset="0"/>
@@ -6259,7 +8964,7 @@
                           <a:ea typeface="Arial" pitchFamily="34" charset="-122"/>
                           <a:cs typeface="Arial" pitchFamily="34" charset="-120"/>
                         </a:rPr>
-                        <a:t>Hauptanalyse (ab 2020, 2'500 m)</a:t>
+                        <a:t>trägt heute</a:t>
                       </a:r>
                       <a:endParaRPr lang="en-US" sz="1400" dirty="0">
                         <a:latin typeface="Arial" charset="0"/>
@@ -6327,7 +9032,7 @@
                           <a:ea typeface="Arial" pitchFamily="34" charset="-122"/>
                           <a:cs typeface="Arial" pitchFamily="34" charset="-120"/>
                         </a:rPr>
-                        <a:t>alle Nachweise</a:t>
+                        <a:t>Grenze</a:t>
                       </a:r>
                       <a:endParaRPr lang="en-US" sz="1400" dirty="0">
                         <a:latin typeface="Arial" charset="0"/>
@@ -6395,7 +9100,7 @@
                           <a:ea typeface="Arial" pitchFamily="34" charset="-122"/>
                           <a:cs typeface="Arial" pitchFamily="34" charset="-120"/>
                         </a:rPr>
-                        <a:t>iNaturalist bis 5'000 m</a:t>
+                        <a:t>nächster Schritt</a:t>
                       </a:r>
                       <a:endParaRPr lang="en-US" sz="1400" dirty="0">
                         <a:latin typeface="Arial" charset="0"/>
@@ -6452,7 +9157,7 @@
                   </a:ext>
                 </a:extLst>
               </a:tr>
-              <a:tr h="530352">
+              <a:tr h="685800">
                 <a:tc>
                   <a:txBody>
                     <a:bodyPr/>
@@ -6470,7 +9175,7 @@
                           <a:ea typeface="Arial" pitchFamily="34" charset="-122"/>
                           <a:cs typeface="Arial" pitchFamily="34" charset="-120"/>
                         </a:rPr>
-                        <a:t>Quadrate / Referenzpaare</a:t>
+                        <a:t>Ingestion</a:t>
                       </a:r>
                       <a:endParaRPr lang="en-US" sz="1400" dirty="0">
                         <a:latin typeface="Arial" charset="0"/>
@@ -6538,7 +9243,7 @@
                           <a:ea typeface="Arial" pitchFamily="34" charset="-122"/>
                           <a:cs typeface="Arial" pitchFamily="34" charset="-120"/>
                         </a:rPr>
-                        <a:t>1'614 / 86'530</a:t>
+                        <a:t>ein GBIF-Download, 1,6 Mio. Zeilen</a:t>
                       </a:r>
                       <a:endParaRPr lang="en-US" sz="1400" dirty="0">
                         <a:latin typeface="Arial" charset="0"/>
@@ -6603,7 +9308,7 @@
                           <a:ea typeface="Arial" pitchFamily="34" charset="-122"/>
                           <a:cs typeface="Arial" pitchFamily="34" charset="-120"/>
                         </a:rPr>
-                        <a:t>1'637 / 127'269</a:t>
+                        <a:t>Search-API höchstens 100'000 Treffer pro Abfrage</a:t>
                       </a:r>
                       <a:endParaRPr lang="en-US" sz="1400" dirty="0">
                         <a:latin typeface="Arial" charset="0"/>
@@ -6668,7 +9373,7 @@
                           <a:ea typeface="Arial" pitchFamily="34" charset="-122"/>
                           <a:cs typeface="Arial" pitchFamily="34" charset="-120"/>
                         </a:rPr>
-                        <a:t>1'614 / 86'530</a:t>
+                        <a:t>Download skaliert; Fallback teilt nach Datensatz, Jahr, Monat</a:t>
                       </a:r>
                       <a:endParaRPr lang="en-US" sz="1400" dirty="0">
                         <a:latin typeface="Arial" charset="0"/>
@@ -6722,7 +9427,7 @@
                   </a:ext>
                 </a:extLst>
               </a:tr>
-              <a:tr h="530352">
+              <a:tr h="685800">
                 <a:tc>
                   <a:txBody>
                     <a:bodyPr/>
@@ -6740,7 +9445,7 @@
                           <a:ea typeface="Arial" pitchFamily="34" charset="-122"/>
                           <a:cs typeface="Arial" pitchFamily="34" charset="-120"/>
                         </a:rPr>
-                        <a:t>mittlere Abdeckung</a:t>
+                        <a:t>Storage</a:t>
                       </a:r>
                       <a:endParaRPr lang="en-US" sz="1400" dirty="0">
                         <a:latin typeface="Arial" charset="0"/>
@@ -6808,7 +9513,7 @@
                           <a:ea typeface="Arial" pitchFamily="34" charset="-122"/>
                           <a:cs typeface="Arial" pitchFamily="34" charset="-120"/>
                         </a:rPr>
-                        <a:t>39,9 %</a:t>
+                        <a:t>Parquet und DuckDB auf einem Rechner</a:t>
                       </a:r>
                       <a:endParaRPr lang="en-US" sz="1400" dirty="0">
                         <a:latin typeface="Arial" charset="0"/>
@@ -6873,7 +9578,7 @@
                           <a:ea typeface="Arial" pitchFamily="34" charset="-122"/>
                           <a:cs typeface="Arial" pitchFamily="34" charset="-120"/>
                         </a:rPr>
-                        <a:t>32,6 %</a:t>
+                        <a:t>ein Schreiber, lokale Festplatte</a:t>
                       </a:r>
                       <a:endParaRPr lang="en-US" sz="1400" dirty="0">
                         <a:latin typeface="Arial" charset="0"/>
@@ -6938,7 +9643,7 @@
                           <a:ea typeface="Arial" pitchFamily="34" charset="-122"/>
                           <a:cs typeface="Arial" pitchFamily="34" charset="-120"/>
                         </a:rPr>
-                        <a:t>39,9 %</a:t>
+                        <a:t>Parquet nach Jahr partitionieren; DuckDB rechnet auch über den RAM hinaus</a:t>
                       </a:r>
                       <a:endParaRPr lang="en-US" sz="1400" dirty="0">
                         <a:latin typeface="Arial" charset="0"/>
@@ -6992,7 +9697,7 @@
                   </a:ext>
                 </a:extLst>
               </a:tr>
-              <a:tr h="530352">
+              <a:tr h="685800">
                 <a:tc>
                   <a:txBody>
                     <a:bodyPr/>
@@ -7010,7 +9715,7 @@
                           <a:ea typeface="Arial" pitchFamily="34" charset="-122"/>
                           <a:cs typeface="Arial" pitchFamily="34" charset="-120"/>
                         </a:rPr>
-                        <a:t>H1 Spearman rho</a:t>
+                        <a:t>Transformation</a:t>
                       </a:r>
                       <a:endParaRPr lang="en-US" sz="1400" dirty="0">
                         <a:latin typeface="Arial" charset="0"/>
@@ -7078,7 +9783,7 @@
                           <a:ea typeface="Arial" pitchFamily="34" charset="-122"/>
                           <a:cs typeface="Arial" pitchFamily="34" charset="-120"/>
                         </a:rPr>
-                        <a:t>0,338</a:t>
+                        <a:t>pandas im Arbeitsspeicher</a:t>
                       </a:r>
                       <a:endParaRPr lang="en-US" sz="1400" dirty="0">
                         <a:latin typeface="Arial" charset="0"/>
@@ -7143,7 +9848,7 @@
                           <a:ea typeface="Arial" pitchFamily="34" charset="-122"/>
                           <a:cs typeface="Arial" pitchFamily="34" charset="-120"/>
                         </a:rPr>
-                        <a:t>0,368</a:t>
+                        <a:t>RAM bei mehreren Millionen Meldungen</a:t>
                       </a:r>
                       <a:endParaRPr lang="en-US" sz="1400" dirty="0">
                         <a:latin typeface="Arial" charset="0"/>
@@ -7208,7 +9913,7 @@
                           <a:ea typeface="Arial" pitchFamily="34" charset="-122"/>
                           <a:cs typeface="Arial" pitchFamily="34" charset="-120"/>
                         </a:rPr>
-                        <a:t>0,339</a:t>
+                        <a:t>Raster und Aggregation in DuckDB-SQL</a:t>
                       </a:r>
                       <a:endParaRPr lang="en-US" sz="1400" dirty="0">
                         <a:latin typeface="Arial" charset="0"/>
@@ -7262,7 +9967,7 @@
                   </a:ext>
                 </a:extLst>
               </a:tr>
-              <a:tr h="530352">
+              <a:tr h="685800">
                 <a:tc>
                   <a:txBody>
                     <a:bodyPr/>
@@ -7280,7 +9985,7 @@
                           <a:ea typeface="Arial" pitchFamily="34" charset="-122"/>
                           <a:cs typeface="Arial" pitchFamily="34" charset="-120"/>
                         </a:rPr>
-                        <a:t>H2 Spearman rho</a:t>
+                        <a:t>Analyse</a:t>
                       </a:r>
                       <a:endParaRPr lang="en-US" sz="1400" dirty="0">
                         <a:latin typeface="Arial" charset="0"/>
@@ -7348,7 +10053,7 @@
                           <a:ea typeface="Arial" pitchFamily="34" charset="-122"/>
                           <a:cs typeface="Arial" pitchFamily="34" charset="-120"/>
                         </a:rPr>
-                        <a:t>−0,001</a:t>
+                        <a:t>1'614 Quadrate</a:t>
                       </a:r>
                       <a:endParaRPr lang="en-US" sz="1400" dirty="0">
                         <a:latin typeface="Arial" charset="0"/>
@@ -7413,7 +10118,7 @@
                           <a:ea typeface="Arial" pitchFamily="34" charset="-122"/>
                           <a:cs typeface="Arial" pitchFamily="34" charset="-120"/>
                         </a:rPr>
-                        <a:t>−0,042</a:t>
+                        <a:t>1-km-Raster: 25-mal mehr Quadrate</a:t>
                       </a:r>
                       <a:endParaRPr lang="en-US" sz="1400" dirty="0">
                         <a:latin typeface="Arial" charset="0"/>
@@ -7478,7 +10183,7 @@
                           <a:ea typeface="Arial" pitchFamily="34" charset="-122"/>
                           <a:cs typeface="Arial" pitchFamily="34" charset="-120"/>
                         </a:rPr>
-                        <a:t>−0,001</a:t>
+                        <a:t>dünn besetzte Gewichtsmatrix für Moran's I ist umgesetzt</a:t>
                       </a:r>
                       <a:endParaRPr lang="en-US" sz="1400" dirty="0">
                         <a:latin typeface="Arial" charset="0"/>
@@ -7529,816 +10234,6 @@
                 <a:extLst>
                   <a:ext uri="{0D108BD9-81ED-4DB2-BD59-A6C34878D82A}">
                     <a16:rowId xmlns:a16="http://schemas.microsoft.com/office/drawing/2014/main" val="10004"/>
-                  </a:ext>
-                </a:extLst>
-              </a:tr>
-              <a:tr h="530352">
-                <a:tc>
-                  <a:txBody>
-                    <a:bodyPr/>
-                    <a:lstStyle/>
-                    <a:p>
-                      <a:pPr marL="0" indent="0">
-                        <a:buNone/>
-                      </a:pPr>
-                      <a:r>
-                        <a:rPr lang="en-US" sz="1400" b="1" dirty="0">
-                          <a:solidFill>
-                            <a:schemeClr val="tx1"/>
-                          </a:solidFill>
-                          <a:latin typeface="Arial" pitchFamily="34" charset="0"/>
-                          <a:ea typeface="Arial" pitchFamily="34" charset="-122"/>
-                          <a:cs typeface="Arial" pitchFamily="34" charset="-120"/>
-                        </a:rPr>
-                        <a:t>H3 Interaktion</a:t>
-                      </a:r>
-                      <a:endParaRPr lang="en-US" sz="1400" dirty="0">
-                        <a:latin typeface="Arial" charset="0"/>
-                        <a:ea typeface="Arial" charset="0"/>
-                        <a:cs typeface="Arial" charset="0"/>
-                      </a:endParaRPr>
-                    </a:p>
-                  </a:txBody>
-                  <a:tcPr marT="54864" marB="54864" anchor="ctr">
-                    <a:lnL w="9525" cap="flat" cmpd="sng" algn="ctr">
-                      <a:solidFill>
-                        <a:srgbClr val="BFC5CC"/>
-                      </a:solidFill>
-                      <a:prstDash val="solid"/>
-                      <a:round/>
-                      <a:headEnd type="none" w="med" len="med"/>
-                      <a:tailEnd type="none" w="med" len="med"/>
-                    </a:lnL>
-                    <a:lnR w="9525" cap="flat" cmpd="sng" algn="ctr">
-                      <a:solidFill>
-                        <a:srgbClr val="BFC5CC"/>
-                      </a:solidFill>
-                      <a:prstDash val="solid"/>
-                      <a:round/>
-                      <a:headEnd type="none" w="med" len="med"/>
-                      <a:tailEnd type="none" w="med" len="med"/>
-                    </a:lnR>
-                    <a:lnT w="9525" cap="flat" cmpd="sng" algn="ctr">
-                      <a:solidFill>
-                        <a:srgbClr val="BFC5CC"/>
-                      </a:solidFill>
-                      <a:prstDash val="solid"/>
-                      <a:round/>
-                      <a:headEnd type="none" w="med" len="med"/>
-                      <a:tailEnd type="none" w="med" len="med"/>
-                    </a:lnT>
-                    <a:lnB w="9525" cap="flat" cmpd="sng" algn="ctr">
-                      <a:solidFill>
-                        <a:srgbClr val="BFC5CC"/>
-                      </a:solidFill>
-                      <a:prstDash val="solid"/>
-                      <a:round/>
-                      <a:headEnd type="none" w="med" len="med"/>
-                      <a:tailEnd type="none" w="med" len="med"/>
-                    </a:lnB>
-                    <a:solidFill>
-                      <a:srgbClr val="F2F2F2"/>
-                    </a:solidFill>
-                  </a:tcPr>
-                </a:tc>
-                <a:tc>
-                  <a:txBody>
-                    <a:bodyPr/>
-                    <a:lstStyle/>
-                    <a:p>
-                      <a:pPr marL="0" indent="0">
-                        <a:buNone/>
-                      </a:pPr>
-                      <a:r>
-                        <a:rPr lang="en-US" sz="1400" dirty="0">
-                          <a:solidFill>
-                            <a:schemeClr val="tx1"/>
-                          </a:solidFill>
-                          <a:latin typeface="Arial" pitchFamily="34" charset="0"/>
-                          <a:ea typeface="Arial" pitchFamily="34" charset="-122"/>
-                          <a:cs typeface="Arial" pitchFamily="34" charset="-120"/>
-                        </a:rPr>
-                        <a:t>+0,235</a:t>
-                      </a:r>
-                      <a:endParaRPr lang="en-US" sz="1400" dirty="0">
-                        <a:latin typeface="Arial" charset="0"/>
-                        <a:ea typeface="Arial" charset="0"/>
-                        <a:cs typeface="Arial" charset="0"/>
-                      </a:endParaRPr>
-                    </a:p>
-                  </a:txBody>
-                  <a:tcPr marT="54864" marB="54864" anchor="ctr">
-                    <a:lnL w="9525" cap="flat" cmpd="sng" algn="ctr">
-                      <a:solidFill>
-                        <a:srgbClr val="BFC5CC"/>
-                      </a:solidFill>
-                      <a:prstDash val="solid"/>
-                      <a:round/>
-                      <a:headEnd type="none" w="med" len="med"/>
-                      <a:tailEnd type="none" w="med" len="med"/>
-                    </a:lnL>
-                    <a:lnR w="9525" cap="flat" cmpd="sng" algn="ctr">
-                      <a:solidFill>
-                        <a:srgbClr val="BFC5CC"/>
-                      </a:solidFill>
-                      <a:prstDash val="solid"/>
-                      <a:round/>
-                      <a:headEnd type="none" w="med" len="med"/>
-                      <a:tailEnd type="none" w="med" len="med"/>
-                    </a:lnR>
-                    <a:lnT w="9525" cap="flat" cmpd="sng" algn="ctr">
-                      <a:solidFill>
-                        <a:srgbClr val="BFC5CC"/>
-                      </a:solidFill>
-                      <a:prstDash val="solid"/>
-                      <a:round/>
-                      <a:headEnd type="none" w="med" len="med"/>
-                      <a:tailEnd type="none" w="med" len="med"/>
-                    </a:lnT>
-                    <a:lnB w="9525" cap="flat" cmpd="sng" algn="ctr">
-                      <a:solidFill>
-                        <a:srgbClr val="BFC5CC"/>
-                      </a:solidFill>
-                      <a:prstDash val="solid"/>
-                      <a:round/>
-                      <a:headEnd type="none" w="med" len="med"/>
-                      <a:tailEnd type="none" w="med" len="med"/>
-                    </a:lnB>
-                  </a:tcPr>
-                </a:tc>
-                <a:tc>
-                  <a:txBody>
-                    <a:bodyPr/>
-                    <a:lstStyle/>
-                    <a:p>
-                      <a:pPr marL="0" indent="0">
-                        <a:buNone/>
-                      </a:pPr>
-                      <a:r>
-                        <a:rPr lang="en-US" sz="1400" dirty="0">
-                          <a:solidFill>
-                            <a:schemeClr val="tx1"/>
-                          </a:solidFill>
-                          <a:latin typeface="Arial" pitchFamily="34" charset="0"/>
-                          <a:ea typeface="Arial" pitchFamily="34" charset="-122"/>
-                          <a:cs typeface="Arial" pitchFamily="34" charset="-120"/>
-                        </a:rPr>
-                        <a:t>+0,204</a:t>
-                      </a:r>
-                      <a:endParaRPr lang="en-US" sz="1400" dirty="0">
-                        <a:latin typeface="Arial" charset="0"/>
-                        <a:ea typeface="Arial" charset="0"/>
-                        <a:cs typeface="Arial" charset="0"/>
-                      </a:endParaRPr>
-                    </a:p>
-                  </a:txBody>
-                  <a:tcPr marT="54864" marB="54864" anchor="ctr">
-                    <a:lnL w="9525" cap="flat" cmpd="sng" algn="ctr">
-                      <a:solidFill>
-                        <a:srgbClr val="BFC5CC"/>
-                      </a:solidFill>
-                      <a:prstDash val="solid"/>
-                      <a:round/>
-                      <a:headEnd type="none" w="med" len="med"/>
-                      <a:tailEnd type="none" w="med" len="med"/>
-                    </a:lnL>
-                    <a:lnR w="9525" cap="flat" cmpd="sng" algn="ctr">
-                      <a:solidFill>
-                        <a:srgbClr val="BFC5CC"/>
-                      </a:solidFill>
-                      <a:prstDash val="solid"/>
-                      <a:round/>
-                      <a:headEnd type="none" w="med" len="med"/>
-                      <a:tailEnd type="none" w="med" len="med"/>
-                    </a:lnR>
-                    <a:lnT w="9525" cap="flat" cmpd="sng" algn="ctr">
-                      <a:solidFill>
-                        <a:srgbClr val="BFC5CC"/>
-                      </a:solidFill>
-                      <a:prstDash val="solid"/>
-                      <a:round/>
-                      <a:headEnd type="none" w="med" len="med"/>
-                      <a:tailEnd type="none" w="med" len="med"/>
-                    </a:lnT>
-                    <a:lnB w="9525" cap="flat" cmpd="sng" algn="ctr">
-                      <a:solidFill>
-                        <a:srgbClr val="BFC5CC"/>
-                      </a:solidFill>
-                      <a:prstDash val="solid"/>
-                      <a:round/>
-                      <a:headEnd type="none" w="med" len="med"/>
-                      <a:tailEnd type="none" w="med" len="med"/>
-                    </a:lnB>
-                  </a:tcPr>
-                </a:tc>
-                <a:tc>
-                  <a:txBody>
-                    <a:bodyPr/>
-                    <a:lstStyle/>
-                    <a:p>
-                      <a:pPr marL="0" indent="0">
-                        <a:buNone/>
-                      </a:pPr>
-                      <a:r>
-                        <a:rPr lang="en-US" sz="1400" dirty="0">
-                          <a:solidFill>
-                            <a:schemeClr val="tx1"/>
-                          </a:solidFill>
-                          <a:latin typeface="Arial" pitchFamily="34" charset="0"/>
-                          <a:ea typeface="Arial" pitchFamily="34" charset="-122"/>
-                          <a:cs typeface="Arial" pitchFamily="34" charset="-120"/>
-                        </a:rPr>
-                        <a:t>+0,236</a:t>
-                      </a:r>
-                      <a:endParaRPr lang="en-US" sz="1400" dirty="0">
-                        <a:latin typeface="Arial" charset="0"/>
-                        <a:ea typeface="Arial" charset="0"/>
-                        <a:cs typeface="Arial" charset="0"/>
-                      </a:endParaRPr>
-                    </a:p>
-                  </a:txBody>
-                  <a:tcPr marT="54864" marB="54864" anchor="ctr">
-                    <a:lnL w="9525" cap="flat" cmpd="sng" algn="ctr">
-                      <a:solidFill>
-                        <a:srgbClr val="BFC5CC"/>
-                      </a:solidFill>
-                      <a:prstDash val="solid"/>
-                      <a:round/>
-                      <a:headEnd type="none" w="med" len="med"/>
-                      <a:tailEnd type="none" w="med" len="med"/>
-                    </a:lnL>
-                    <a:lnR w="9525" cap="flat" cmpd="sng" algn="ctr">
-                      <a:solidFill>
-                        <a:srgbClr val="BFC5CC"/>
-                      </a:solidFill>
-                      <a:prstDash val="solid"/>
-                      <a:round/>
-                      <a:headEnd type="none" w="med" len="med"/>
-                      <a:tailEnd type="none" w="med" len="med"/>
-                    </a:lnR>
-                    <a:lnT w="9525" cap="flat" cmpd="sng" algn="ctr">
-                      <a:solidFill>
-                        <a:srgbClr val="BFC5CC"/>
-                      </a:solidFill>
-                      <a:prstDash val="solid"/>
-                      <a:round/>
-                      <a:headEnd type="none" w="med" len="med"/>
-                      <a:tailEnd type="none" w="med" len="med"/>
-                    </a:lnT>
-                    <a:lnB w="9525" cap="flat" cmpd="sng" algn="ctr">
-                      <a:solidFill>
-                        <a:srgbClr val="BFC5CC"/>
-                      </a:solidFill>
-                      <a:prstDash val="solid"/>
-                      <a:round/>
-                      <a:headEnd type="none" w="med" len="med"/>
-                      <a:tailEnd type="none" w="med" len="med"/>
-                    </a:lnB>
-                  </a:tcPr>
-                </a:tc>
-                <a:extLst>
-                  <a:ext uri="{0D108BD9-81ED-4DB2-BD59-A6C34878D82A}">
-                    <a16:rowId xmlns:a16="http://schemas.microsoft.com/office/drawing/2014/main" val="10005"/>
-                  </a:ext>
-                </a:extLst>
-              </a:tr>
-              <a:tr h="530352">
-                <a:tc>
-                  <a:txBody>
-                    <a:bodyPr/>
-                    <a:lstStyle/>
-                    <a:p>
-                      <a:pPr marL="0" indent="0">
-                        <a:buNone/>
-                      </a:pPr>
-                      <a:r>
-                        <a:rPr lang="en-US" sz="1400" b="1" dirty="0">
-                          <a:solidFill>
-                            <a:schemeClr val="tx1"/>
-                          </a:solidFill>
-                          <a:latin typeface="Arial" pitchFamily="34" charset="0"/>
-                          <a:ea typeface="Arial" pitchFamily="34" charset="-122"/>
-                          <a:cs typeface="Arial" pitchFamily="34" charset="-120"/>
-                        </a:rPr>
-                        <a:t>Siedlung in Modell 2</a:t>
-                      </a:r>
-                      <a:endParaRPr lang="en-US" sz="1400" dirty="0">
-                        <a:latin typeface="Arial" charset="0"/>
-                        <a:ea typeface="Arial" charset="0"/>
-                        <a:cs typeface="Arial" charset="0"/>
-                      </a:endParaRPr>
-                    </a:p>
-                  </a:txBody>
-                  <a:tcPr marT="54864" marB="54864" anchor="ctr">
-                    <a:lnL w="9525" cap="flat" cmpd="sng" algn="ctr">
-                      <a:solidFill>
-                        <a:srgbClr val="BFC5CC"/>
-                      </a:solidFill>
-                      <a:prstDash val="solid"/>
-                      <a:round/>
-                      <a:headEnd type="none" w="med" len="med"/>
-                      <a:tailEnd type="none" w="med" len="med"/>
-                    </a:lnL>
-                    <a:lnR w="9525" cap="flat" cmpd="sng" algn="ctr">
-                      <a:solidFill>
-                        <a:srgbClr val="BFC5CC"/>
-                      </a:solidFill>
-                      <a:prstDash val="solid"/>
-                      <a:round/>
-                      <a:headEnd type="none" w="med" len="med"/>
-                      <a:tailEnd type="none" w="med" len="med"/>
-                    </a:lnR>
-                    <a:lnT w="9525" cap="flat" cmpd="sng" algn="ctr">
-                      <a:solidFill>
-                        <a:srgbClr val="BFC5CC"/>
-                      </a:solidFill>
-                      <a:prstDash val="solid"/>
-                      <a:round/>
-                      <a:headEnd type="none" w="med" len="med"/>
-                      <a:tailEnd type="none" w="med" len="med"/>
-                    </a:lnT>
-                    <a:lnB w="9525" cap="flat" cmpd="sng" algn="ctr">
-                      <a:solidFill>
-                        <a:srgbClr val="BFC5CC"/>
-                      </a:solidFill>
-                      <a:prstDash val="solid"/>
-                      <a:round/>
-                      <a:headEnd type="none" w="med" len="med"/>
-                      <a:tailEnd type="none" w="med" len="med"/>
-                    </a:lnB>
-                    <a:solidFill>
-                      <a:srgbClr val="F2F2F2"/>
-                    </a:solidFill>
-                  </a:tcPr>
-                </a:tc>
-                <a:tc>
-                  <a:txBody>
-                    <a:bodyPr/>
-                    <a:lstStyle/>
-                    <a:p>
-                      <a:pPr marL="0" indent="0">
-                        <a:buNone/>
-                      </a:pPr>
-                      <a:r>
-                        <a:rPr lang="en-US" sz="1400" dirty="0">
-                          <a:solidFill>
-                            <a:schemeClr val="tx1"/>
-                          </a:solidFill>
-                          <a:latin typeface="Arial" pitchFamily="34" charset="0"/>
-                          <a:ea typeface="Arial" pitchFamily="34" charset="-122"/>
-                          <a:cs typeface="Arial" pitchFamily="34" charset="-120"/>
-                        </a:rPr>
-                        <a:t>−0,059 (n. s.)</a:t>
-                      </a:r>
-                      <a:endParaRPr lang="en-US" sz="1400" dirty="0">
-                        <a:latin typeface="Arial" charset="0"/>
-                        <a:ea typeface="Arial" charset="0"/>
-                        <a:cs typeface="Arial" charset="0"/>
-                      </a:endParaRPr>
-                    </a:p>
-                  </a:txBody>
-                  <a:tcPr marT="54864" marB="54864" anchor="ctr">
-                    <a:lnL w="9525" cap="flat" cmpd="sng" algn="ctr">
-                      <a:solidFill>
-                        <a:srgbClr val="BFC5CC"/>
-                      </a:solidFill>
-                      <a:prstDash val="solid"/>
-                      <a:round/>
-                      <a:headEnd type="none" w="med" len="med"/>
-                      <a:tailEnd type="none" w="med" len="med"/>
-                    </a:lnL>
-                    <a:lnR w="9525" cap="flat" cmpd="sng" algn="ctr">
-                      <a:solidFill>
-                        <a:srgbClr val="BFC5CC"/>
-                      </a:solidFill>
-                      <a:prstDash val="solid"/>
-                      <a:round/>
-                      <a:headEnd type="none" w="med" len="med"/>
-                      <a:tailEnd type="none" w="med" len="med"/>
-                    </a:lnR>
-                    <a:lnT w="9525" cap="flat" cmpd="sng" algn="ctr">
-                      <a:solidFill>
-                        <a:srgbClr val="BFC5CC"/>
-                      </a:solidFill>
-                      <a:prstDash val="solid"/>
-                      <a:round/>
-                      <a:headEnd type="none" w="med" len="med"/>
-                      <a:tailEnd type="none" w="med" len="med"/>
-                    </a:lnT>
-                    <a:lnB w="9525" cap="flat" cmpd="sng" algn="ctr">
-                      <a:solidFill>
-                        <a:srgbClr val="BFC5CC"/>
-                      </a:solidFill>
-                      <a:prstDash val="solid"/>
-                      <a:round/>
-                      <a:headEnd type="none" w="med" len="med"/>
-                      <a:tailEnd type="none" w="med" len="med"/>
-                    </a:lnB>
-                  </a:tcPr>
-                </a:tc>
-                <a:tc>
-                  <a:txBody>
-                    <a:bodyPr/>
-                    <a:lstStyle/>
-                    <a:p>
-                      <a:pPr marL="0" indent="0">
-                        <a:buNone/>
-                      </a:pPr>
-                      <a:r>
-                        <a:rPr lang="en-US" sz="1400" dirty="0">
-                          <a:solidFill>
-                            <a:schemeClr val="tx1"/>
-                          </a:solidFill>
-                          <a:latin typeface="Arial" pitchFamily="34" charset="0"/>
-                          <a:ea typeface="Arial" pitchFamily="34" charset="-122"/>
-                          <a:cs typeface="Arial" pitchFamily="34" charset="-120"/>
-                        </a:rPr>
-                        <a:t>−0,044 (n. s.)</a:t>
-                      </a:r>
-                      <a:endParaRPr lang="en-US" sz="1400" dirty="0">
-                        <a:latin typeface="Arial" charset="0"/>
-                        <a:ea typeface="Arial" charset="0"/>
-                        <a:cs typeface="Arial" charset="0"/>
-                      </a:endParaRPr>
-                    </a:p>
-                  </a:txBody>
-                  <a:tcPr marT="54864" marB="54864" anchor="ctr">
-                    <a:lnL w="9525" cap="flat" cmpd="sng" algn="ctr">
-                      <a:solidFill>
-                        <a:srgbClr val="BFC5CC"/>
-                      </a:solidFill>
-                      <a:prstDash val="solid"/>
-                      <a:round/>
-                      <a:headEnd type="none" w="med" len="med"/>
-                      <a:tailEnd type="none" w="med" len="med"/>
-                    </a:lnL>
-                    <a:lnR w="9525" cap="flat" cmpd="sng" algn="ctr">
-                      <a:solidFill>
-                        <a:srgbClr val="BFC5CC"/>
-                      </a:solidFill>
-                      <a:prstDash val="solid"/>
-                      <a:round/>
-                      <a:headEnd type="none" w="med" len="med"/>
-                      <a:tailEnd type="none" w="med" len="med"/>
-                    </a:lnR>
-                    <a:lnT w="9525" cap="flat" cmpd="sng" algn="ctr">
-                      <a:solidFill>
-                        <a:srgbClr val="BFC5CC"/>
-                      </a:solidFill>
-                      <a:prstDash val="solid"/>
-                      <a:round/>
-                      <a:headEnd type="none" w="med" len="med"/>
-                      <a:tailEnd type="none" w="med" len="med"/>
-                    </a:lnT>
-                    <a:lnB w="9525" cap="flat" cmpd="sng" algn="ctr">
-                      <a:solidFill>
-                        <a:srgbClr val="BFC5CC"/>
-                      </a:solidFill>
-                      <a:prstDash val="solid"/>
-                      <a:round/>
-                      <a:headEnd type="none" w="med" len="med"/>
-                      <a:tailEnd type="none" w="med" len="med"/>
-                    </a:lnB>
-                  </a:tcPr>
-                </a:tc>
-                <a:tc>
-                  <a:txBody>
-                    <a:bodyPr/>
-                    <a:lstStyle/>
-                    <a:p>
-                      <a:pPr marL="0" indent="0">
-                        <a:buNone/>
-                      </a:pPr>
-                      <a:r>
-                        <a:rPr lang="en-US" sz="1400" dirty="0">
-                          <a:solidFill>
-                            <a:schemeClr val="tx1"/>
-                          </a:solidFill>
-                          <a:latin typeface="Arial" pitchFamily="34" charset="0"/>
-                          <a:ea typeface="Arial" pitchFamily="34" charset="-122"/>
-                          <a:cs typeface="Arial" pitchFamily="34" charset="-120"/>
-                        </a:rPr>
-                        <a:t>−0,058 (n. s.)</a:t>
-                      </a:r>
-                      <a:endParaRPr lang="en-US" sz="1400" dirty="0">
-                        <a:latin typeface="Arial" charset="0"/>
-                        <a:ea typeface="Arial" charset="0"/>
-                        <a:cs typeface="Arial" charset="0"/>
-                      </a:endParaRPr>
-                    </a:p>
-                  </a:txBody>
-                  <a:tcPr marT="54864" marB="54864" anchor="ctr">
-                    <a:lnL w="9525" cap="flat" cmpd="sng" algn="ctr">
-                      <a:solidFill>
-                        <a:srgbClr val="BFC5CC"/>
-                      </a:solidFill>
-                      <a:prstDash val="solid"/>
-                      <a:round/>
-                      <a:headEnd type="none" w="med" len="med"/>
-                      <a:tailEnd type="none" w="med" len="med"/>
-                    </a:lnL>
-                    <a:lnR w="9525" cap="flat" cmpd="sng" algn="ctr">
-                      <a:solidFill>
-                        <a:srgbClr val="BFC5CC"/>
-                      </a:solidFill>
-                      <a:prstDash val="solid"/>
-                      <a:round/>
-                      <a:headEnd type="none" w="med" len="med"/>
-                      <a:tailEnd type="none" w="med" len="med"/>
-                    </a:lnR>
-                    <a:lnT w="9525" cap="flat" cmpd="sng" algn="ctr">
-                      <a:solidFill>
-                        <a:srgbClr val="BFC5CC"/>
-                      </a:solidFill>
-                      <a:prstDash val="solid"/>
-                      <a:round/>
-                      <a:headEnd type="none" w="med" len="med"/>
-                      <a:tailEnd type="none" w="med" len="med"/>
-                    </a:lnT>
-                    <a:lnB w="9525" cap="flat" cmpd="sng" algn="ctr">
-                      <a:solidFill>
-                        <a:srgbClr val="BFC5CC"/>
-                      </a:solidFill>
-                      <a:prstDash val="solid"/>
-                      <a:round/>
-                      <a:headEnd type="none" w="med" len="med"/>
-                      <a:tailEnd type="none" w="med" len="med"/>
-                    </a:lnB>
-                  </a:tcPr>
-                </a:tc>
-                <a:extLst>
-                  <a:ext uri="{0D108BD9-81ED-4DB2-BD59-A6C34878D82A}">
-                    <a16:rowId xmlns:a16="http://schemas.microsoft.com/office/drawing/2014/main" val="10006"/>
-                  </a:ext>
-                </a:extLst>
-              </a:tr>
-              <a:tr h="530352">
-                <a:tc>
-                  <a:txBody>
-                    <a:bodyPr/>
-                    <a:lstStyle/>
-                    <a:p>
-                      <a:pPr marL="0" indent="0">
-                        <a:buNone/>
-                      </a:pPr>
-                      <a:r>
-                        <a:rPr lang="en-US" sz="1400" b="1" dirty="0">
-                          <a:solidFill>
-                            <a:schemeClr val="tx1"/>
-                          </a:solidFill>
-                          <a:latin typeface="Arial" pitchFamily="34" charset="0"/>
-                          <a:ea typeface="Arial" pitchFamily="34" charset="-122"/>
-                          <a:cs typeface="Arial" pitchFamily="34" charset="-120"/>
-                        </a:rPr>
-                        <a:t>Moran's I der Residuen</a:t>
-                      </a:r>
-                      <a:endParaRPr lang="en-US" sz="1400" dirty="0">
-                        <a:latin typeface="Arial" charset="0"/>
-                        <a:ea typeface="Arial" charset="0"/>
-                        <a:cs typeface="Arial" charset="0"/>
-                      </a:endParaRPr>
-                    </a:p>
-                  </a:txBody>
-                  <a:tcPr marT="54864" marB="54864" anchor="ctr">
-                    <a:lnL w="9525" cap="flat" cmpd="sng" algn="ctr">
-                      <a:solidFill>
-                        <a:srgbClr val="BFC5CC"/>
-                      </a:solidFill>
-                      <a:prstDash val="solid"/>
-                      <a:round/>
-                      <a:headEnd type="none" w="med" len="med"/>
-                      <a:tailEnd type="none" w="med" len="med"/>
-                    </a:lnL>
-                    <a:lnR w="9525" cap="flat" cmpd="sng" algn="ctr">
-                      <a:solidFill>
-                        <a:srgbClr val="BFC5CC"/>
-                      </a:solidFill>
-                      <a:prstDash val="solid"/>
-                      <a:round/>
-                      <a:headEnd type="none" w="med" len="med"/>
-                      <a:tailEnd type="none" w="med" len="med"/>
-                    </a:lnR>
-                    <a:lnT w="9525" cap="flat" cmpd="sng" algn="ctr">
-                      <a:solidFill>
-                        <a:srgbClr val="BFC5CC"/>
-                      </a:solidFill>
-                      <a:prstDash val="solid"/>
-                      <a:round/>
-                      <a:headEnd type="none" w="med" len="med"/>
-                      <a:tailEnd type="none" w="med" len="med"/>
-                    </a:lnT>
-                    <a:lnB w="9525" cap="flat" cmpd="sng" algn="ctr">
-                      <a:solidFill>
-                        <a:srgbClr val="BFC5CC"/>
-                      </a:solidFill>
-                      <a:prstDash val="solid"/>
-                      <a:round/>
-                      <a:headEnd type="none" w="med" len="med"/>
-                      <a:tailEnd type="none" w="med" len="med"/>
-                    </a:lnB>
-                    <a:solidFill>
-                      <a:srgbClr val="F2F2F2"/>
-                    </a:solidFill>
-                  </a:tcPr>
-                </a:tc>
-                <a:tc>
-                  <a:txBody>
-                    <a:bodyPr/>
-                    <a:lstStyle/>
-                    <a:p>
-                      <a:pPr marL="0" indent="0">
-                        <a:buNone/>
-                      </a:pPr>
-                      <a:r>
-                        <a:rPr lang="en-US" sz="1400" dirty="0">
-                          <a:solidFill>
-                            <a:schemeClr val="tx1"/>
-                          </a:solidFill>
-                          <a:latin typeface="Arial" pitchFamily="34" charset="0"/>
-                          <a:ea typeface="Arial" pitchFamily="34" charset="-122"/>
-                          <a:cs typeface="Arial" pitchFamily="34" charset="-120"/>
-                        </a:rPr>
-                        <a:t>0,113</a:t>
-                      </a:r>
-                      <a:endParaRPr lang="en-US" sz="1400" dirty="0">
-                        <a:latin typeface="Arial" charset="0"/>
-                        <a:ea typeface="Arial" charset="0"/>
-                        <a:cs typeface="Arial" charset="0"/>
-                      </a:endParaRPr>
-                    </a:p>
-                  </a:txBody>
-                  <a:tcPr marT="54864" marB="54864" anchor="ctr">
-                    <a:lnL w="9525" cap="flat" cmpd="sng" algn="ctr">
-                      <a:solidFill>
-                        <a:srgbClr val="BFC5CC"/>
-                      </a:solidFill>
-                      <a:prstDash val="solid"/>
-                      <a:round/>
-                      <a:headEnd type="none" w="med" len="med"/>
-                      <a:tailEnd type="none" w="med" len="med"/>
-                    </a:lnL>
-                    <a:lnR w="9525" cap="flat" cmpd="sng" algn="ctr">
-                      <a:solidFill>
-                        <a:srgbClr val="BFC5CC"/>
-                      </a:solidFill>
-                      <a:prstDash val="solid"/>
-                      <a:round/>
-                      <a:headEnd type="none" w="med" len="med"/>
-                      <a:tailEnd type="none" w="med" len="med"/>
-                    </a:lnR>
-                    <a:lnT w="9525" cap="flat" cmpd="sng" algn="ctr">
-                      <a:solidFill>
-                        <a:srgbClr val="BFC5CC"/>
-                      </a:solidFill>
-                      <a:prstDash val="solid"/>
-                      <a:round/>
-                      <a:headEnd type="none" w="med" len="med"/>
-                      <a:tailEnd type="none" w="med" len="med"/>
-                    </a:lnT>
-                    <a:lnB w="9525" cap="flat" cmpd="sng" algn="ctr">
-                      <a:solidFill>
-                        <a:srgbClr val="BFC5CC"/>
-                      </a:solidFill>
-                      <a:prstDash val="solid"/>
-                      <a:round/>
-                      <a:headEnd type="none" w="med" len="med"/>
-                      <a:tailEnd type="none" w="med" len="med"/>
-                    </a:lnB>
-                  </a:tcPr>
-                </a:tc>
-                <a:tc>
-                  <a:txBody>
-                    <a:bodyPr/>
-                    <a:lstStyle/>
-                    <a:p>
-                      <a:pPr marL="0" indent="0">
-                        <a:buNone/>
-                      </a:pPr>
-                      <a:r>
-                        <a:rPr lang="en-US" sz="1400" dirty="0">
-                          <a:solidFill>
-                            <a:schemeClr val="tx1"/>
-                          </a:solidFill>
-                          <a:latin typeface="Arial" pitchFamily="34" charset="0"/>
-                          <a:ea typeface="Arial" pitchFamily="34" charset="-122"/>
-                          <a:cs typeface="Arial" pitchFamily="34" charset="-120"/>
-                        </a:rPr>
-                        <a:t>0,160</a:t>
-                      </a:r>
-                      <a:endParaRPr lang="en-US" sz="1400" dirty="0">
-                        <a:latin typeface="Arial" charset="0"/>
-                        <a:ea typeface="Arial" charset="0"/>
-                        <a:cs typeface="Arial" charset="0"/>
-                      </a:endParaRPr>
-                    </a:p>
-                  </a:txBody>
-                  <a:tcPr marT="54864" marB="54864" anchor="ctr">
-                    <a:lnL w="9525" cap="flat" cmpd="sng" algn="ctr">
-                      <a:solidFill>
-                        <a:srgbClr val="BFC5CC"/>
-                      </a:solidFill>
-                      <a:prstDash val="solid"/>
-                      <a:round/>
-                      <a:headEnd type="none" w="med" len="med"/>
-                      <a:tailEnd type="none" w="med" len="med"/>
-                    </a:lnL>
-                    <a:lnR w="9525" cap="flat" cmpd="sng" algn="ctr">
-                      <a:solidFill>
-                        <a:srgbClr val="BFC5CC"/>
-                      </a:solidFill>
-                      <a:prstDash val="solid"/>
-                      <a:round/>
-                      <a:headEnd type="none" w="med" len="med"/>
-                      <a:tailEnd type="none" w="med" len="med"/>
-                    </a:lnR>
-                    <a:lnT w="9525" cap="flat" cmpd="sng" algn="ctr">
-                      <a:solidFill>
-                        <a:srgbClr val="BFC5CC"/>
-                      </a:solidFill>
-                      <a:prstDash val="solid"/>
-                      <a:round/>
-                      <a:headEnd type="none" w="med" len="med"/>
-                      <a:tailEnd type="none" w="med" len="med"/>
-                    </a:lnT>
-                    <a:lnB w="9525" cap="flat" cmpd="sng" algn="ctr">
-                      <a:solidFill>
-                        <a:srgbClr val="BFC5CC"/>
-                      </a:solidFill>
-                      <a:prstDash val="solid"/>
-                      <a:round/>
-                      <a:headEnd type="none" w="med" len="med"/>
-                      <a:tailEnd type="none" w="med" len="med"/>
-                    </a:lnB>
-                  </a:tcPr>
-                </a:tc>
-                <a:tc>
-                  <a:txBody>
-                    <a:bodyPr/>
-                    <a:lstStyle/>
-                    <a:p>
-                      <a:pPr marL="0" indent="0">
-                        <a:buNone/>
-                      </a:pPr>
-                      <a:r>
-                        <a:rPr lang="en-US" sz="1400" dirty="0">
-                          <a:solidFill>
-                            <a:schemeClr val="tx1"/>
-                          </a:solidFill>
-                          <a:latin typeface="Arial" pitchFamily="34" charset="0"/>
-                          <a:ea typeface="Arial" pitchFamily="34" charset="-122"/>
-                          <a:cs typeface="Arial" pitchFamily="34" charset="-120"/>
-                        </a:rPr>
-                        <a:t>0,113</a:t>
-                      </a:r>
-                      <a:endParaRPr lang="en-US" sz="1400" dirty="0">
-                        <a:latin typeface="Arial" charset="0"/>
-                        <a:ea typeface="Arial" charset="0"/>
-                        <a:cs typeface="Arial" charset="0"/>
-                      </a:endParaRPr>
-                    </a:p>
-                  </a:txBody>
-                  <a:tcPr marT="54864" marB="54864" anchor="ctr">
-                    <a:lnL w="9525" cap="flat" cmpd="sng" algn="ctr">
-                      <a:solidFill>
-                        <a:srgbClr val="BFC5CC"/>
-                      </a:solidFill>
-                      <a:prstDash val="solid"/>
-                      <a:round/>
-                      <a:headEnd type="none" w="med" len="med"/>
-                      <a:tailEnd type="none" w="med" len="med"/>
-                    </a:lnL>
-                    <a:lnR w="9525" cap="flat" cmpd="sng" algn="ctr">
-                      <a:solidFill>
-                        <a:srgbClr val="BFC5CC"/>
-                      </a:solidFill>
-                      <a:prstDash val="solid"/>
-                      <a:round/>
-                      <a:headEnd type="none" w="med" len="med"/>
-                      <a:tailEnd type="none" w="med" len="med"/>
-                    </a:lnR>
-                    <a:lnT w="9525" cap="flat" cmpd="sng" algn="ctr">
-                      <a:solidFill>
-                        <a:srgbClr val="BFC5CC"/>
-                      </a:solidFill>
-                      <a:prstDash val="solid"/>
-                      <a:round/>
-                      <a:headEnd type="none" w="med" len="med"/>
-                      <a:tailEnd type="none" w="med" len="med"/>
-                    </a:lnT>
-                    <a:lnB w="9525" cap="flat" cmpd="sng" algn="ctr">
-                      <a:solidFill>
-                        <a:srgbClr val="BFC5CC"/>
-                      </a:solidFill>
-                      <a:prstDash val="solid"/>
-                      <a:round/>
-                      <a:headEnd type="none" w="med" len="med"/>
-                      <a:tailEnd type="none" w="med" len="med"/>
-                    </a:lnB>
-                  </a:tcPr>
-                </a:tc>
-                <a:extLst>
-                  <a:ext uri="{0D108BD9-81ED-4DB2-BD59-A6C34878D82A}">
-                    <a16:rowId xmlns:a16="http://schemas.microsoft.com/office/drawing/2014/main" val="10007"/>
                   </a:ext>
                 </a:extLst>
               </a:tr>
@@ -10015,7 +11910,7 @@
                   <a:schemeClr val="bg1"/>
                 </a:solidFill>
               </a:rPr>
-              <a:t>Lebenszyklus: Batch und ELT auf einem Rechner</a:t>
+              <a:t>Lebenszyklus: Batch und ETL auf einem Rechner</a:t>
             </a:r>
             <a:endParaRPr lang="en-US" sz="3000" dirty="0"/>
           </a:p>
@@ -10622,7 +12517,7 @@
                           <a:ea typeface="Arial" pitchFamily="34" charset="-122"/>
                           <a:cs typeface="Arial" pitchFamily="34" charset="-120"/>
                         </a:rPr>
-                        <a:t>Rohdaten unverändert, Parquet und DuckDB, eine Analysetabelle pro Quadrat</a:t>
+                        <a:t>Rohdaten unverändert als Dateien, Parquet als Ablage, DuckDB als Abfrage-Engine</a:t>
                       </a:r>
                       <a:endParaRPr lang="en-US" sz="1500" dirty="0">
                         <a:latin typeface="Arial" charset="0"/>
@@ -10687,7 +12582,7 @@
                           <a:ea typeface="Arial" pitchFamily="34" charset="-122"/>
                           <a:cs typeface="Arial" pitchFamily="34" charset="-120"/>
                         </a:rPr>
-                        <a:t>LV95-Raster, Brutzeit, Artabgleich, Hashing, Abdeckungsquote</a:t>
+                        <a:t>LV95-Raster, Brutzeit, Artabgleich, Hashing, Datenprüfungen, Hypothesentests</a:t>
                       </a:r>
                       <a:endParaRPr lang="en-US" sz="1500" dirty="0">
                         <a:latin typeface="Arial" charset="0"/>
@@ -10752,7 +12647,7 @@
                           <a:ea typeface="Arial" pitchFamily="34" charset="-122"/>
                           <a:cs typeface="Arial" pitchFamily="34" charset="-120"/>
                         </a:rPr>
-                        <a:t>Hypothesentests, Karten, marimo-Notebook, Präsentation</a:t>
+                        <a:t>Teil 1: Notebook und Präsentation; Teil 2: Option B (Machine Learning)</a:t>
                       </a:r>
                       <a:endParaRPr lang="en-US" sz="1500" dirty="0">
                         <a:latin typeface="Arial" charset="0"/>
@@ -10880,7 +12775,7 @@
                   <a:schemeClr val="tx1"/>
                 </a:solidFill>
               </a:rPr>
-              <a:t>Security (Beobachter gehasht), Data Management (Taxon-Mapping, DOI), DataOps (Protokoll, Prüfsumme), Orchestration (feste Skriptreihenfolge)</a:t>
+              <a:t>Security (Beobachter gehasht), Data Management (Taxon-Mapping, DOI), DataOps (Protokoll, Prüfsumme, 35 Datenprüfungen), Orchestration (run_all.sh, Abbruch bei Fehler)</a:t>
             </a:r>
             <a:endParaRPr lang="en-US" sz="1600" dirty="0"/>
           </a:p>
@@ -12293,7 +14188,7 @@
                   <a:schemeClr val="tx1"/>
                 </a:solidFill>
               </a:rPr>
-              <a:t>Wir priorisieren Einfachheit und Reproduzierbarkeit, akzeptieren einen Schreiber und keine deutlich grösseren Datenmengen und begrenzen das Risiko durch unveränderte Rohdaten in Parquet.</a:t>
+              <a:t>Parquet ist die Ablage, DuckDB die Abfrage-Engine. Wir priorisieren Einfachheit und Reproduzierbarkeit, akzeptieren einen Schreiber und begrenzen das Risiko durch unveränderte Rohdaten.</a:t>
             </a:r>
             <a:endParaRPr lang="en-US" sz="1500" dirty="0"/>
           </a:p>
@@ -12316,12 +14211,26 @@
               <a:buNone/>
             </a:pPr>
             <a:r>
+              <a:rPr lang="en-US" sz="1500" b="1" dirty="0">
+                <a:solidFill>
+                  <a:schemeClr val="accent1"/>
+                </a:solidFill>
+              </a:rPr>
+              <a:t>Kriterien</a:t>
+            </a:r>
+            <a:endParaRPr lang="en-US" sz="1500" dirty="0"/>
+          </a:p>
+          <a:p>
+            <a:pPr marL="0" indent="0">
+              <a:buNone/>
+            </a:pPr>
+            <a:r>
               <a:rPr lang="en-US" sz="1500" dirty="0">
                 <a:solidFill>
                   <a:schemeClr val="tx1"/>
                 </a:solidFill>
               </a:rPr>
-              <a:t>Die SQLite-Datei läge über dem GitHub-Limit von 100 MB. PostgreSQL mit PostGIS haben wir nicht gemessen: Es braucht einen Server und wir brauchen keine Raumfunktionen.</a:t>
+              <a:t>Spaltenweise Aggregation (OLAP), kein Server, ein Schreiber im Batch: ACID und CAP spielen keine Rolle. PostgreSQL brächte Betrieb ohne Nutzen.</a:t>
             </a:r>
             <a:endParaRPr lang="en-US" sz="1500" dirty="0"/>
           </a:p>
@@ -12357,7 +14266,7 @@
                   <a:schemeClr val="accent4"/>
                 </a:solidFill>
               </a:rPr>
-              <a:t>Einzelmessung auf den Projektdaten (4,1 Mio. Hektaren, 1,6 Mio. Meldungen)</a:t>
+              <a:t>Einzelmessung ohne Wiederholung. Ladezeiten nur bedingt vergleichbar (verschiedene Lader), Abfragezeiten schon.</a:t>
             </a:r>
             <a:endParaRPr lang="en-US" sz="1200" dirty="0"/>
           </a:p>
@@ -12534,7 +14443,7 @@
         <p:spPr>
           <a:xfrm>
             <a:off x="6675120" y="1600200"/>
-            <a:ext cx="4965192" cy="3566160"/>
+            <a:ext cx="4965192" cy="4434840"/>
           </a:xfrm>
           <a:prstGeom prst="rect">
             <a:avLst/>
@@ -12566,7 +14475,7 @@
         <p:spPr>
           <a:xfrm>
             <a:off x="6903720" y="1783080"/>
-            <a:ext cx="4507992" cy="3200400"/>
+            <a:ext cx="4507992" cy="4069080"/>
           </a:xfrm>
           <a:prstGeom prst="rect">
             <a:avLst/>
@@ -12704,6 +14613,42 @@
                 </a:solidFill>
               </a:rPr>
               <a:t>Beobachter-IDs werden vor dem Speichern gehasht</a:t>
+            </a:r>
+            <a:endParaRPr lang="en-US" sz="1700" dirty="0"/>
+          </a:p>
+          <a:p>
+            <a:pPr marL="0" indent="0">
+              <a:buNone/>
+            </a:pPr>
+            <a:r>
+              <a:rPr lang="en-US" sz="800" dirty="0">
+                <a:solidFill>
+                  <a:schemeClr val="tx1"/>
+                </a:solidFill>
+              </a:rPr>
+              <a:t> </a:t>
+            </a:r>
+            <a:endParaRPr lang="en-US" sz="1700" dirty="0"/>
+          </a:p>
+          <a:p>
+            <a:pPr marL="0" indent="0">
+              <a:buNone/>
+            </a:pPr>
+            <a:r>
+              <a:rPr lang="en-US" sz="1700" b="1" dirty="0">
+                <a:solidFill>
+                  <a:schemeClr val="accent1"/>
+                </a:solidFill>
+              </a:rPr>
+              <a:t>Prüfungen  </a:t>
+            </a:r>
+            <a:r>
+              <a:rPr lang="en-US" sz="1700" dirty="0">
+                <a:solidFill>
+                  <a:schemeClr val="tx1"/>
+                </a:solidFill>
+              </a:rPr>
+              <a:t>35 Datenprüfungen nach jedem Lauf (Muster dbt-Tests), Abbruch bei Fehler</a:t>
             </a:r>
             <a:endParaRPr lang="en-US" sz="1700" dirty="0"/>
           </a:p>
@@ -13105,7 +15050,7 @@
                           <a:ea typeface="Arial" pitchFamily="34" charset="-122"/>
                           <a:cs typeface="Arial" pitchFamily="34" charset="-120"/>
                         </a:rPr>
-                        <a:t>Mittlere Abdeckung der Referenzpaare</a:t>
+                        <a:t>Mittlere Abdeckungsquote je Quadrat</a:t>
                       </a:r>
                       <a:endParaRPr lang="en-US" sz="1400" dirty="0">
                         <a:latin typeface="Arial" charset="0"/>

--- a/docs/presentation/daeng_kolloquium1_rama_stermcnik_vogelmann_birdreports.pptx
+++ b/docs/presentation/daeng_kolloquium1_rama_stermcnik_vogelmann_birdreports.pptx
@@ -5,7 +5,7 @@
     <p:sldMasterId id="2147483648" r:id="rId1"/>
   </p:sldMasterIdLst>
   <p:notesMasterIdLst>
-    <p:notesMasterId r:id="rId15"/>
+    <p:notesMasterId r:id="rId16"/>
   </p:notesMasterIdLst>
   <p:sldIdLst>
     <p:sldId id="256" r:id="rId2"/>
@@ -21,7 +21,7 @@
     <p:sldId id="266" r:id="rId12"/>
     <p:sldId id="267" r:id="rId13"/>
     <p:sldId id="268" r:id="rId14"/>
-    <p:sldId id="269" r:id="rId20"/>
+    <p:sldId id="269" r:id="rId15"/>
   </p:sldIdLst>
   <p:sldSz cx="12192000" cy="6858000"/>
   <p:notesSz cx="6858000" cy="12192000"/>
@@ -147,6 +147,7 @@
         <p14:section name="Reserve" id="{D9F91DDC-A6BA-75C2-D0C1-AB6A76ECAAED}">
           <p14:sldIdLst>
             <p14:sldId id="268"/>
+            <p14:sldId id="269"/>
           </p14:sldIdLst>
         </p14:section>
       </p14:sectionLst>
@@ -1832,7 +1833,7 @@
 </file>
 
 <file path=ppt/notesSlides/notesSlide14.xml><?xml version="1.0" encoding="utf-8"?>
-<p:notes xmlns:a="http://schemas.openxmlformats.org/drawingml/2006/main" xmlns:p="http://schemas.openxmlformats.org/presentationml/2006/main" xmlns:r="http://schemas.openxmlformats.org/officeDocument/2006/relationships">
+<p:notes xmlns:a="http://schemas.openxmlformats.org/drawingml/2006/main" xmlns:r="http://schemas.openxmlformats.org/officeDocument/2006/relationships" xmlns:p="http://schemas.openxmlformats.org/presentationml/2006/main">
   <p:cSld>
     <p:spTree>
       <p:nvGrpSpPr>
@@ -3012,7 +3013,7 @@
           </a:prstGeom>
           <a:extLst>
             <a:ext uri="{C572A759-6A51-4108-AA02-DFA0A04FC94B}">
-              <ma14:wrappingTextBoxFlag xmlns="" xmlns:ma14="http://schemas.microsoft.com/office/mac/drawingml/2011/main" val="0"/>
+              <ma14:wrappingTextBoxFlag xmlns:ma14="http://schemas.microsoft.com/office/mac/drawingml/2011/main" xmlns="" val="0"/>
             </a:ext>
           </a:extLst>
         </p:spPr>
@@ -3087,7 +3088,7 @@
           </a:prstGeom>
           <a:extLst>
             <a:ext uri="{C572A759-6A51-4108-AA02-DFA0A04FC94B}">
-              <ma14:wrappingTextBoxFlag xmlns="" xmlns:ma14="http://schemas.microsoft.com/office/mac/drawingml/2011/main" val="0"/>
+              <ma14:wrappingTextBoxFlag xmlns:ma14="http://schemas.microsoft.com/office/mac/drawingml/2011/main" xmlns="" val="0"/>
             </a:ext>
           </a:extLst>
         </p:spPr>
@@ -3740,7 +3741,7 @@
         </p:nvGraphicFramePr>
         <p:xfrm>
           <a:off x="6492240" y="1600200"/>
-          <a:ext cx="5148072" cy="2898648"/>
+          <a:ext cx="5148072" cy="3380232"/>
         </p:xfrm>
         <a:graphic>
           <a:graphicData uri="http://schemas.openxmlformats.org/drawingml/2006/table">
@@ -4645,7 +4646,7 @@
           </a:prstGeom>
           <a:extLst>
             <a:ext uri="{C572A759-6A51-4108-AA02-DFA0A04FC94B}">
-              <ma14:wrappingTextBoxFlag xmlns="" xmlns:ma14="http://schemas.microsoft.com/office/mac/drawingml/2011/main" val="0"/>
+              <ma14:wrappingTextBoxFlag xmlns:ma14="http://schemas.microsoft.com/office/mac/drawingml/2011/main" xmlns="" val="0"/>
             </a:ext>
           </a:extLst>
         </p:spPr>
@@ -5636,7 +5637,7 @@
           </a:prstGeom>
           <a:extLst>
             <a:ext uri="{C572A759-6A51-4108-AA02-DFA0A04FC94B}">
-              <ma14:wrappingTextBoxFlag xmlns="" xmlns:ma14="http://schemas.microsoft.com/office/mac/drawingml/2011/main" val="0"/>
+              <ma14:wrappingTextBoxFlag xmlns:ma14="http://schemas.microsoft.com/office/mac/drawingml/2011/main" xmlns="" val="0"/>
             </a:ext>
           </a:extLst>
         </p:spPr>
@@ -6070,7 +6071,7 @@
           </a:prstGeom>
           <a:extLst>
             <a:ext uri="{C572A759-6A51-4108-AA02-DFA0A04FC94B}">
-              <ma14:wrappingTextBoxFlag xmlns="" xmlns:ma14="http://schemas.microsoft.com/office/mac/drawingml/2011/main" val="0"/>
+              <ma14:wrappingTextBoxFlag xmlns:ma14="http://schemas.microsoft.com/office/mac/drawingml/2011/main" xmlns="" val="0"/>
             </a:ext>
           </a:extLst>
         </p:spPr>
@@ -6185,12 +6186,12 @@
               <a:buNone/>
             </a:pPr>
             <a:r>
-              <a:rPr lang="en-US" sz="1200" dirty="0">
+              <a:rPr lang="en-US" sz="1200" dirty="0" err="1">
                 <a:solidFill>
                   <a:srgbClr val="9CC7E8"/>
                 </a:solidFill>
               </a:rPr>
-              <a:t>Reserve · Sensitivität</a:t>
+              <a:t>Sensitivität</a:t>
             </a:r>
             <a:endParaRPr lang="en-US" sz="1200" dirty="0"/>
           </a:p>
@@ -8132,7 +8133,7 @@
                 </a:tc>
                 <a:extLst>
                   <a:ext uri="{0D108BD9-81ED-4DB2-BD59-A6C34878D82A}">
-                    <a16:rowId xmlns:a16="http://schemas.microsoft.com/office/drawing/2014/main" val="10005"/>
+                    <a16:rowId xmlns:a16="http://schemas.microsoft.com/office/drawing/2014/main" val="1172422081"/>
                   </a:ext>
                 </a:extLst>
               </a:tr>
@@ -8700,7 +8701,7 @@
           </a:prstGeom>
           <a:extLst>
             <a:ext uri="{C572A759-6A51-4108-AA02-DFA0A04FC94B}">
-              <ma14:wrappingTextBoxFlag xmlns="" xmlns:ma14="http://schemas.microsoft.com/office/mac/drawingml/2011/main" val="0"/>
+              <ma14:wrappingTextBoxFlag xmlns:ma14="http://schemas.microsoft.com/office/mac/drawingml/2011/main" xmlns="" val="0"/>
             </a:ext>
           </a:extLst>
         </p:spPr>
@@ -8815,12 +8816,12 @@
               <a:buNone/>
             </a:pPr>
             <a:r>
-              <a:rPr lang="en-US" sz="1200" dirty="0">
+              <a:rPr lang="en-US" sz="1200" dirty="0" err="1">
                 <a:solidFill>
                   <a:srgbClr val="9CC7E8"/>
                 </a:solidFill>
               </a:rPr>
-              <a:t>Reserve · Skalierbarkeit</a:t>
+              <a:t>Skalierbarkeit</a:t>
             </a:r>
             <a:endParaRPr lang="en-US" sz="1200" dirty="0"/>
           </a:p>
@@ -8842,7 +8843,7 @@
         </p:nvGraphicFramePr>
         <p:xfrm>
           <a:off x="548640" y="1600200"/>
-          <a:ext cx="11091672" cy="3273552"/>
+          <a:ext cx="11091672" cy="3337560"/>
         </p:xfrm>
         <a:graphic>
           <a:graphicData uri="http://schemas.openxmlformats.org/drawingml/2006/table">
@@ -10261,7 +10262,7 @@
           </a:prstGeom>
           <a:extLst>
             <a:ext uri="{C572A759-6A51-4108-AA02-DFA0A04FC94B}">
-              <ma14:wrappingTextBoxFlag xmlns="" xmlns:ma14="http://schemas.microsoft.com/office/mac/drawingml/2011/main" val="0"/>
+              <ma14:wrappingTextBoxFlag xmlns:ma14="http://schemas.microsoft.com/office/mac/drawingml/2011/main" xmlns="" val="0"/>
             </a:ext>
           </a:extLst>
         </p:spPr>
@@ -10280,7 +10281,7 @@
             <a:pPr algn="r"/>
             <a:fld id="{F7021451-1387-4CA6-816F-3879F97B5CBC}" type="slidenum">
               <a:rPr lang="en-US" b="0"/>
-              <a:t>13</a:t>
+              <a:t>14</a:t>
             </a:fld>
             <a:endParaRPr lang="en-US"/>
           </a:p>
@@ -10643,7 +10644,7 @@
           </a:prstGeom>
           <a:extLst>
             <a:ext uri="{C572A759-6A51-4108-AA02-DFA0A04FC94B}">
-              <ma14:wrappingTextBoxFlag xmlns="" xmlns:ma14="http://schemas.microsoft.com/office/mac/drawingml/2011/main" val="0"/>
+              <ma14:wrappingTextBoxFlag xmlns:ma14="http://schemas.microsoft.com/office/mac/drawingml/2011/main" xmlns="" val="0"/>
             </a:ext>
           </a:extLst>
         </p:spPr>
@@ -11826,7 +11827,7 @@
           </a:prstGeom>
           <a:extLst>
             <a:ext uri="{C572A759-6A51-4108-AA02-DFA0A04FC94B}">
-              <ma14:wrappingTextBoxFlag xmlns="" xmlns:ma14="http://schemas.microsoft.com/office/mac/drawingml/2011/main" val="0"/>
+              <ma14:wrappingTextBoxFlag xmlns:ma14="http://schemas.microsoft.com/office/mac/drawingml/2011/main" xmlns="" val="0"/>
             </a:ext>
           </a:extLst>
         </p:spPr>
@@ -12869,7 +12870,7 @@
           </a:prstGeom>
           <a:extLst>
             <a:ext uri="{C572A759-6A51-4108-AA02-DFA0A04FC94B}">
-              <ma14:wrappingTextBoxFlag xmlns="" xmlns:ma14="http://schemas.microsoft.com/office/mac/drawingml/2011/main" val="0"/>
+              <ma14:wrappingTextBoxFlag xmlns:ma14="http://schemas.microsoft.com/office/mac/drawingml/2011/main" xmlns="" val="0"/>
             </a:ext>
           </a:extLst>
         </p:spPr>
@@ -13954,7 +13955,7 @@
           </a:prstGeom>
           <a:extLst>
             <a:ext uri="{C572A759-6A51-4108-AA02-DFA0A04FC94B}">
-              <ma14:wrappingTextBoxFlag xmlns="" xmlns:ma14="http://schemas.microsoft.com/office/mac/drawingml/2011/main" val="0"/>
+              <ma14:wrappingTextBoxFlag xmlns:ma14="http://schemas.microsoft.com/office/mac/drawingml/2011/main" xmlns="" val="0"/>
             </a:ext>
           </a:extLst>
         </p:spPr>
@@ -14292,7 +14293,7 @@
           </a:prstGeom>
           <a:extLst>
             <a:ext uri="{C572A759-6A51-4108-AA02-DFA0A04FC94B}">
-              <ma14:wrappingTextBoxFlag xmlns="" xmlns:ma14="http://schemas.microsoft.com/office/mac/drawingml/2011/main" val="0"/>
+              <ma14:wrappingTextBoxFlag xmlns:ma14="http://schemas.microsoft.com/office/mac/drawingml/2011/main" xmlns="" val="0"/>
             </a:ext>
           </a:extLst>
         </p:spPr>
@@ -14674,7 +14675,7 @@
           </a:prstGeom>
           <a:extLst>
             <a:ext uri="{C572A759-6A51-4108-AA02-DFA0A04FC94B}">
-              <ma14:wrappingTextBoxFlag xmlns="" xmlns:ma14="http://schemas.microsoft.com/office/mac/drawingml/2011/main" val="0"/>
+              <ma14:wrappingTextBoxFlag xmlns:ma14="http://schemas.microsoft.com/office/mac/drawingml/2011/main" xmlns="" val="0"/>
             </a:ext>
           </a:extLst>
         </p:spPr>
@@ -15602,7 +15603,7 @@
           </a:prstGeom>
           <a:extLst>
             <a:ext uri="{C572A759-6A51-4108-AA02-DFA0A04FC94B}">
-              <ma14:wrappingTextBoxFlag xmlns="" xmlns:ma14="http://schemas.microsoft.com/office/mac/drawingml/2011/main" val="0"/>
+              <ma14:wrappingTextBoxFlag xmlns:ma14="http://schemas.microsoft.com/office/mac/drawingml/2011/main" xmlns="" val="0"/>
             </a:ext>
           </a:extLst>
         </p:spPr>
@@ -16908,7 +16909,7 @@
           </a:prstGeom>
           <a:extLst>
             <a:ext uri="{C572A759-6A51-4108-AA02-DFA0A04FC94B}">
-              <ma14:wrappingTextBoxFlag xmlns="" xmlns:ma14="http://schemas.microsoft.com/office/mac/drawingml/2011/main" val="0"/>
+              <ma14:wrappingTextBoxFlag xmlns:ma14="http://schemas.microsoft.com/office/mac/drawingml/2011/main" xmlns="" val="0"/>
             </a:ext>
           </a:extLst>
         </p:spPr>
